--- a/midterm/midTermPresentation.pptx
+++ b/midterm/midTermPresentation.pptx
@@ -24,7 +24,7 @@
     <p:sldId id="274" r:id="rId16"/>
     <p:sldId id="269" r:id="rId17"/>
     <p:sldId id="270" r:id="rId18"/>
-    <p:sldId id="262" r:id="rId19"/>
+    <p:sldId id="275" r:id="rId19"/>
   </p:sldIdLst>
   <p:sldSz cx="12192000" cy="6858000"/>
   <p:notesSz cx="6858000" cy="9144000"/>
@@ -193,7 +193,7 @@
 <file path=ppt/revisionInfo.xml><?xml version="1.0" encoding="utf-8"?>
 <p1510:revInfo xmlns:a="http://schemas.openxmlformats.org/drawingml/2006/main" xmlns:r="http://schemas.openxmlformats.org/officeDocument/2006/relationships" xmlns:p1510="http://schemas.microsoft.com/office/powerpoint/2015/10/main">
   <p1510:revLst>
-    <p1510:client id="{112BC77B-2BDB-4490-A732-E33B67E0BFFD}" v="16" dt="2026-04-28T10:10:15.225"/>
+    <p1510:client id="{112BC77B-2BDB-4490-A732-E33B67E0BFFD}" v="50" dt="2026-04-30T05:53:50.876"/>
   </p1510:revLst>
 </p1510:revInfo>
 </file>
@@ -203,40 +203,12 @@
   <pc:docChgLst>
     <pc:chgData name="Bastian Hymon" userId="6acb79db21e93a52" providerId="LiveId" clId="{AFD1EFC9-6E2C-4DA6-A940-3F0352D7692A}"/>
     <pc:docChg chg="undo custSel addSld delSld modSld sldOrd">
-      <pc:chgData name="Bastian Hymon" userId="6acb79db21e93a52" providerId="LiveId" clId="{AFD1EFC9-6E2C-4DA6-A940-3F0352D7692A}" dt="2026-04-28T10:10:30.872" v="658" actId="20577"/>
+      <pc:chgData name="Bastian Hymon" userId="6acb79db21e93a52" providerId="LiveId" clId="{AFD1EFC9-6E2C-4DA6-A940-3F0352D7692A}" dt="2026-04-30T05:53:59.496" v="1120" actId="20577"/>
       <pc:docMkLst>
         <pc:docMk/>
       </pc:docMkLst>
-      <pc:sldChg chg="add del">
-        <pc:chgData name="Bastian Hymon" userId="6acb79db21e93a52" providerId="LiveId" clId="{AFD1EFC9-6E2C-4DA6-A940-3F0352D7692A}" dt="2026-04-28T07:32:27.988" v="72" actId="47"/>
-        <pc:sldMkLst>
-          <pc:docMk/>
-          <pc:sldMk cId="3169017830" sldId="257"/>
-        </pc:sldMkLst>
-      </pc:sldChg>
-      <pc:sldChg chg="add del">
-        <pc:chgData name="Bastian Hymon" userId="6acb79db21e93a52" providerId="LiveId" clId="{AFD1EFC9-6E2C-4DA6-A940-3F0352D7692A}" dt="2026-04-28T07:32:28.160" v="73" actId="47"/>
-        <pc:sldMkLst>
-          <pc:docMk/>
-          <pc:sldMk cId="3385139955" sldId="258"/>
-        </pc:sldMkLst>
-      </pc:sldChg>
-      <pc:sldChg chg="add del">
-        <pc:chgData name="Bastian Hymon" userId="6acb79db21e93a52" providerId="LiveId" clId="{AFD1EFC9-6E2C-4DA6-A940-3F0352D7692A}" dt="2026-04-28T07:32:28.309" v="74" actId="47"/>
-        <pc:sldMkLst>
-          <pc:docMk/>
-          <pc:sldMk cId="812961269" sldId="259"/>
-        </pc:sldMkLst>
-      </pc:sldChg>
-      <pc:sldChg chg="add del">
-        <pc:chgData name="Bastian Hymon" userId="6acb79db21e93a52" providerId="LiveId" clId="{AFD1EFC9-6E2C-4DA6-A940-3F0352D7692A}" dt="2026-04-28T07:32:28.822" v="75" actId="47"/>
-        <pc:sldMkLst>
-          <pc:docMk/>
-          <pc:sldMk cId="1859879280" sldId="260"/>
-        </pc:sldMkLst>
-      </pc:sldChg>
-      <pc:sldChg chg="modSp add del mod">
-        <pc:chgData name="Bastian Hymon" userId="6acb79db21e93a52" providerId="LiveId" clId="{AFD1EFC9-6E2C-4DA6-A940-3F0352D7692A}" dt="2026-04-28T07:59:27.753" v="525" actId="1076"/>
+      <pc:sldChg chg="addSp delSp modSp add del mod">
+        <pc:chgData name="Bastian Hymon" userId="6acb79db21e93a52" providerId="LiveId" clId="{AFD1EFC9-6E2C-4DA6-A940-3F0352D7692A}" dt="2026-04-30T05:51:28.776" v="1047" actId="478"/>
         <pc:sldMkLst>
           <pc:docMk/>
           <pc:sldMk cId="518339137" sldId="261"/>
@@ -249,45 +221,70 @@
             <ac:spMk id="2" creationId="{80AD557D-0DB7-6AFC-EEF9-08E04F9257D8}"/>
           </ac:spMkLst>
         </pc:spChg>
-        <pc:spChg chg="mod">
-          <ac:chgData name="Bastian Hymon" userId="6acb79db21e93a52" providerId="LiveId" clId="{AFD1EFC9-6E2C-4DA6-A940-3F0352D7692A}" dt="2026-04-28T07:59:27.753" v="525" actId="1076"/>
+        <pc:spChg chg="add del mod">
+          <ac:chgData name="Bastian Hymon" userId="6acb79db21e93a52" providerId="LiveId" clId="{AFD1EFC9-6E2C-4DA6-A940-3F0352D7692A}" dt="2026-04-30T05:51:27.046" v="1046" actId="478"/>
           <ac:spMkLst>
             <pc:docMk/>
             <pc:sldMk cId="518339137" sldId="261"/>
             <ac:spMk id="4" creationId="{EFA8503C-1687-F9CF-75A6-441253ECCF6C}"/>
           </ac:spMkLst>
         </pc:spChg>
-      </pc:sldChg>
-      <pc:sldChg chg="modSp new del mod ord">
-        <pc:chgData name="Bastian Hymon" userId="6acb79db21e93a52" providerId="LiveId" clId="{AFD1EFC9-6E2C-4DA6-A940-3F0352D7692A}" dt="2026-04-28T07:32:22.322" v="64" actId="680"/>
-        <pc:sldMkLst>
-          <pc:docMk/>
-          <pc:sldMk cId="162822078" sldId="263"/>
-        </pc:sldMkLst>
         <pc:spChg chg="mod">
-          <ac:chgData name="Bastian Hymon" userId="6acb79db21e93a52" providerId="LiveId" clId="{AFD1EFC9-6E2C-4DA6-A940-3F0352D7692A}" dt="2026-04-28T07:32:21.930" v="62" actId="20577"/>
+          <ac:chgData name="Bastian Hymon" userId="6acb79db21e93a52" providerId="LiveId" clId="{AFD1EFC9-6E2C-4DA6-A940-3F0352D7692A}" dt="2026-04-30T05:51:21.139" v="1043" actId="20577"/>
           <ac:spMkLst>
             <pc:docMk/>
-            <pc:sldMk cId="162822078" sldId="263"/>
-            <ac:spMk id="16" creationId="{4C1B3AEE-EB1E-6377-65C9-0A337C8C0E94}"/>
+            <pc:sldMk cId="518339137" sldId="261"/>
+            <ac:spMk id="5" creationId="{FECDA5A2-B2BF-473D-A67B-E1B62D4B72E9}"/>
+          </ac:spMkLst>
+        </pc:spChg>
+        <pc:spChg chg="add del mod">
+          <ac:chgData name="Bastian Hymon" userId="6acb79db21e93a52" providerId="LiveId" clId="{AFD1EFC9-6E2C-4DA6-A940-3F0352D7692A}" dt="2026-04-30T05:51:25.716" v="1045" actId="478"/>
+          <ac:spMkLst>
+            <pc:docMk/>
+            <pc:sldMk cId="518339137" sldId="261"/>
+            <ac:spMk id="7" creationId="{228B0426-C71B-176C-BDB9-A33D0BD79D0D}"/>
+          </ac:spMkLst>
+        </pc:spChg>
+        <pc:spChg chg="add del mod">
+          <ac:chgData name="Bastian Hymon" userId="6acb79db21e93a52" providerId="LiveId" clId="{AFD1EFC9-6E2C-4DA6-A940-3F0352D7692A}" dt="2026-04-30T05:51:28.776" v="1047" actId="478"/>
+          <ac:spMkLst>
+            <pc:docMk/>
+            <pc:sldMk cId="518339137" sldId="261"/>
+            <ac:spMk id="10" creationId="{56230A9A-9894-1B16-3076-9F17B71F6BE9}"/>
           </ac:spMkLst>
         </pc:spChg>
       </pc:sldChg>
-      <pc:sldChg chg="new add del">
-        <pc:chgData name="Bastian Hymon" userId="6acb79db21e93a52" providerId="LiveId" clId="{AFD1EFC9-6E2C-4DA6-A940-3F0352D7692A}" dt="2026-04-28T07:32:22.824" v="66" actId="680"/>
+      <pc:sldChg chg="modSp del mod">
+        <pc:chgData name="Bastian Hymon" userId="6acb79db21e93a52" providerId="LiveId" clId="{AFD1EFC9-6E2C-4DA6-A940-3F0352D7692A}" dt="2026-04-30T05:53:11.083" v="1085" actId="47"/>
         <pc:sldMkLst>
           <pc:docMk/>
-          <pc:sldMk cId="988713509" sldId="263"/>
+          <pc:sldMk cId="44672609" sldId="262"/>
         </pc:sldMkLst>
+        <pc:spChg chg="mod">
+          <ac:chgData name="Bastian Hymon" userId="6acb79db21e93a52" providerId="LiveId" clId="{AFD1EFC9-6E2C-4DA6-A940-3F0352D7692A}" dt="2026-04-30T05:53:00.581" v="1068"/>
+          <ac:spMkLst>
+            <pc:docMk/>
+            <pc:sldMk cId="44672609" sldId="262"/>
+            <ac:spMk id="3" creationId="{951755B3-D6D0-0BDE-01FC-40B3DB5F0E9E}"/>
+          </ac:spMkLst>
+        </pc:spChg>
+        <pc:spChg chg="mod">
+          <ac:chgData name="Bastian Hymon" userId="6acb79db21e93a52" providerId="LiveId" clId="{AFD1EFC9-6E2C-4DA6-A940-3F0352D7692A}" dt="2026-04-30T05:53:07.315" v="1084" actId="20577"/>
+          <ac:spMkLst>
+            <pc:docMk/>
+            <pc:sldMk cId="44672609" sldId="262"/>
+            <ac:spMk id="5" creationId="{A07147D1-2036-95F4-774C-93DDF337863C}"/>
+          </ac:spMkLst>
+        </pc:spChg>
       </pc:sldChg>
-      <pc:sldChg chg="modSp new mod">
-        <pc:chgData name="Bastian Hymon" userId="6acb79db21e93a52" providerId="LiveId" clId="{AFD1EFC9-6E2C-4DA6-A940-3F0352D7692A}" dt="2026-04-28T07:36:01.982" v="342" actId="20577"/>
+      <pc:sldChg chg="addSp delSp modSp new mod">
+        <pc:chgData name="Bastian Hymon" userId="6acb79db21e93a52" providerId="LiveId" clId="{AFD1EFC9-6E2C-4DA6-A940-3F0352D7692A}" dt="2026-04-30T05:53:59.496" v="1120" actId="20577"/>
         <pc:sldMkLst>
           <pc:docMk/>
           <pc:sldMk cId="3016980530" sldId="263"/>
         </pc:sldMkLst>
         <pc:spChg chg="mod">
-          <ac:chgData name="Bastian Hymon" userId="6acb79db21e93a52" providerId="LiveId" clId="{AFD1EFC9-6E2C-4DA6-A940-3F0352D7692A}" dt="2026-04-28T07:34:31.999" v="211" actId="20577"/>
+          <ac:chgData name="Bastian Hymon" userId="6acb79db21e93a52" providerId="LiveId" clId="{AFD1EFC9-6E2C-4DA6-A940-3F0352D7692A}" dt="2026-04-30T05:38:12.156" v="687" actId="20577"/>
           <ac:spMkLst>
             <pc:docMk/>
             <pc:sldMk cId="3016980530" sldId="263"/>
@@ -295,7 +292,7 @@
           </ac:spMkLst>
         </pc:spChg>
         <pc:spChg chg="mod">
-          <ac:chgData name="Bastian Hymon" userId="6acb79db21e93a52" providerId="LiveId" clId="{AFD1EFC9-6E2C-4DA6-A940-3F0352D7692A}" dt="2026-04-28T07:34:58.376" v="256" actId="20577"/>
+          <ac:chgData name="Bastian Hymon" userId="6acb79db21e93a52" providerId="LiveId" clId="{AFD1EFC9-6E2C-4DA6-A940-3F0352D7692A}" dt="2026-04-30T05:38:17.748" v="700" actId="20577"/>
           <ac:spMkLst>
             <pc:docMk/>
             <pc:sldMk cId="3016980530" sldId="263"/>
@@ -303,7 +300,7 @@
           </ac:spMkLst>
         </pc:spChg>
         <pc:spChg chg="mod">
-          <ac:chgData name="Bastian Hymon" userId="6acb79db21e93a52" providerId="LiveId" clId="{AFD1EFC9-6E2C-4DA6-A940-3F0352D7692A}" dt="2026-04-28T07:34:51.009" v="245" actId="20577"/>
+          <ac:chgData name="Bastian Hymon" userId="6acb79db21e93a52" providerId="LiveId" clId="{AFD1EFC9-6E2C-4DA6-A940-3F0352D7692A}" dt="2026-04-30T05:38:21.052" v="708" actId="20577"/>
           <ac:spMkLst>
             <pc:docMk/>
             <pc:sldMk cId="3016980530" sldId="263"/>
@@ -311,7 +308,7 @@
           </ac:spMkLst>
         </pc:spChg>
         <pc:spChg chg="mod">
-          <ac:chgData name="Bastian Hymon" userId="6acb79db21e93a52" providerId="LiveId" clId="{AFD1EFC9-6E2C-4DA6-A940-3F0352D7692A}" dt="2026-04-28T07:35:54.195" v="306" actId="20577"/>
+          <ac:chgData name="Bastian Hymon" userId="6acb79db21e93a52" providerId="LiveId" clId="{AFD1EFC9-6E2C-4DA6-A940-3F0352D7692A}" dt="2026-04-30T05:38:23.902" v="713" actId="20577"/>
           <ac:spMkLst>
             <pc:docMk/>
             <pc:sldMk cId="3016980530" sldId="263"/>
@@ -319,7 +316,7 @@
           </ac:spMkLst>
         </pc:spChg>
         <pc:spChg chg="mod">
-          <ac:chgData name="Bastian Hymon" userId="6acb79db21e93a52" providerId="LiveId" clId="{AFD1EFC9-6E2C-4DA6-A940-3F0352D7692A}" dt="2026-04-28T07:35:24.971" v="303" actId="20577"/>
+          <ac:chgData name="Bastian Hymon" userId="6acb79db21e93a52" providerId="LiveId" clId="{AFD1EFC9-6E2C-4DA6-A940-3F0352D7692A}" dt="2026-04-30T05:38:27.029" v="723" actId="20577"/>
           <ac:spMkLst>
             <pc:docMk/>
             <pc:sldMk cId="3016980530" sldId="263"/>
@@ -327,11 +324,19 @@
           </ac:spMkLst>
         </pc:spChg>
         <pc:spChg chg="mod">
-          <ac:chgData name="Bastian Hymon" userId="6acb79db21e93a52" providerId="LiveId" clId="{AFD1EFC9-6E2C-4DA6-A940-3F0352D7692A}" dt="2026-04-28T07:36:01.982" v="342" actId="20577"/>
+          <ac:chgData name="Bastian Hymon" userId="6acb79db21e93a52" providerId="LiveId" clId="{AFD1EFC9-6E2C-4DA6-A940-3F0352D7692A}" dt="2026-04-30T05:38:35.530" v="733" actId="5793"/>
           <ac:spMkLst>
             <pc:docMk/>
             <pc:sldMk cId="3016980530" sldId="263"/>
             <ac:spMk id="7" creationId="{32A23976-8518-E452-304C-38EAD5C34045}"/>
+          </ac:spMkLst>
+        </pc:spChg>
+        <pc:spChg chg="add del mod">
+          <ac:chgData name="Bastian Hymon" userId="6acb79db21e93a52" providerId="LiveId" clId="{AFD1EFC9-6E2C-4DA6-A940-3F0352D7692A}" dt="2026-04-30T05:52:02.299" v="1054"/>
+          <ac:spMkLst>
+            <pc:docMk/>
+            <pc:sldMk cId="3016980530" sldId="263"/>
+            <ac:spMk id="8" creationId="{611F3A3C-FD39-B607-474C-49F27BE4D950}"/>
           </ac:spMkLst>
         </pc:spChg>
         <pc:spChg chg="mod">
@@ -383,7 +388,7 @@
           </ac:spMkLst>
         </pc:spChg>
         <pc:spChg chg="mod">
-          <ac:chgData name="Bastian Hymon" userId="6acb79db21e93a52" providerId="LiveId" clId="{AFD1EFC9-6E2C-4DA6-A940-3F0352D7692A}" dt="2026-04-28T07:33:19.097" v="157" actId="20577"/>
+          <ac:chgData name="Bastian Hymon" userId="6acb79db21e93a52" providerId="LiveId" clId="{AFD1EFC9-6E2C-4DA6-A940-3F0352D7692A}" dt="2026-04-30T05:53:59.496" v="1120" actId="20577"/>
           <ac:spMkLst>
             <pc:docMk/>
             <pc:sldMk cId="3016980530" sldId="263"/>
@@ -398,15 +403,39 @@
             <ac:spMk id="17" creationId="{9E374974-D925-47C6-BCDE-E5343F0F3EB1}"/>
           </ac:spMkLst>
         </pc:spChg>
+        <pc:spChg chg="add mod">
+          <ac:chgData name="Bastian Hymon" userId="6acb79db21e93a52" providerId="LiveId" clId="{AFD1EFC9-6E2C-4DA6-A940-3F0352D7692A}" dt="2026-04-30T05:51:49.952" v="1050"/>
+          <ac:spMkLst>
+            <pc:docMk/>
+            <pc:sldMk cId="3016980530" sldId="263"/>
+            <ac:spMk id="18" creationId="{AC9D9A03-1CE2-9591-B92B-1C254BCB480F}"/>
+          </ac:spMkLst>
+        </pc:spChg>
+        <pc:spChg chg="add mod">
+          <ac:chgData name="Bastian Hymon" userId="6acb79db21e93a52" providerId="LiveId" clId="{AFD1EFC9-6E2C-4DA6-A940-3F0352D7692A}" dt="2026-04-30T05:51:57.265" v="1053"/>
+          <ac:spMkLst>
+            <pc:docMk/>
+            <pc:sldMk cId="3016980530" sldId="263"/>
+            <ac:spMk id="19" creationId="{B8455C9A-8278-32D9-A14B-B308B007C36E}"/>
+          </ac:spMkLst>
+        </pc:spChg>
       </pc:sldChg>
-      <pc:sldChg chg="modSp new mod ord">
-        <pc:chgData name="Bastian Hymon" userId="6acb79db21e93a52" providerId="LiveId" clId="{AFD1EFC9-6E2C-4DA6-A940-3F0352D7692A}" dt="2026-04-28T07:37:05.954" v="402" actId="5793"/>
+      <pc:sldChg chg="addSp delSp modSp new mod ord">
+        <pc:chgData name="Bastian Hymon" userId="6acb79db21e93a52" providerId="LiveId" clId="{AFD1EFC9-6E2C-4DA6-A940-3F0352D7692A}" dt="2026-04-30T05:52:08.522" v="1055"/>
         <pc:sldMkLst>
           <pc:docMk/>
           <pc:sldMk cId="31810064" sldId="264"/>
         </pc:sldMkLst>
         <pc:spChg chg="mod">
-          <ac:chgData name="Bastian Hymon" userId="6acb79db21e93a52" providerId="LiveId" clId="{AFD1EFC9-6E2C-4DA6-A940-3F0352D7692A}" dt="2026-04-28T07:36:53.492" v="381" actId="20577"/>
+          <ac:chgData name="Bastian Hymon" userId="6acb79db21e93a52" providerId="LiveId" clId="{AFD1EFC9-6E2C-4DA6-A940-3F0352D7692A}" dt="2026-04-30T05:52:08.522" v="1055"/>
+          <ac:spMkLst>
+            <pc:docMk/>
+            <pc:sldMk cId="31810064" sldId="264"/>
+            <ac:spMk id="2" creationId="{9E952946-FB3D-C10F-A94C-B90440B92448}"/>
+          </ac:spMkLst>
+        </pc:spChg>
+        <pc:spChg chg="mod">
+          <ac:chgData name="Bastian Hymon" userId="6acb79db21e93a52" providerId="LiveId" clId="{AFD1EFC9-6E2C-4DA6-A940-3F0352D7692A}" dt="2026-04-30T05:38:50.565" v="754" actId="20577"/>
           <ac:spMkLst>
             <pc:docMk/>
             <pc:sldMk cId="31810064" sldId="264"/>
@@ -421,45 +450,47 @@
             <ac:spMk id="5" creationId="{E4FBACF3-43B2-FB60-FFE6-2F51D0EDCF30}"/>
           </ac:spMkLst>
         </pc:spChg>
-        <pc:spChg chg="mod">
-          <ac:chgData name="Bastian Hymon" userId="6acb79db21e93a52" providerId="LiveId" clId="{AFD1EFC9-6E2C-4DA6-A940-3F0352D7692A}" dt="2026-04-28T07:37:05.954" v="402" actId="5793"/>
+        <pc:spChg chg="add del mod">
+          <ac:chgData name="Bastian Hymon" userId="6acb79db21e93a52" providerId="LiveId" clId="{AFD1EFC9-6E2C-4DA6-A940-3F0352D7692A}" dt="2026-04-30T05:41:27.619" v="758"/>
           <ac:spMkLst>
             <pc:docMk/>
             <pc:sldMk cId="31810064" sldId="264"/>
             <ac:spMk id="6" creationId="{6881F226-370F-5927-67AA-42EF64B0D7BF}"/>
           </ac:spMkLst>
         </pc:spChg>
-      </pc:sldChg>
-      <pc:sldChg chg="new del">
-        <pc:chgData name="Bastian Hymon" userId="6acb79db21e93a52" providerId="LiveId" clId="{AFD1EFC9-6E2C-4DA6-A940-3F0352D7692A}" dt="2026-04-28T07:36:31.625" v="344" actId="47"/>
-        <pc:sldMkLst>
-          <pc:docMk/>
-          <pc:sldMk cId="996825239" sldId="264"/>
-        </pc:sldMkLst>
-      </pc:sldChg>
-      <pc:sldChg chg="modSp new del mod ord">
-        <pc:chgData name="Bastian Hymon" userId="6acb79db21e93a52" providerId="LiveId" clId="{AFD1EFC9-6E2C-4DA6-A940-3F0352D7692A}" dt="2026-04-28T07:32:21.293" v="57" actId="680"/>
-        <pc:sldMkLst>
-          <pc:docMk/>
-          <pc:sldMk cId="1874239562" sldId="264"/>
-        </pc:sldMkLst>
-        <pc:spChg chg="mod">
-          <ac:chgData name="Bastian Hymon" userId="6acb79db21e93a52" providerId="LiveId" clId="{AFD1EFC9-6E2C-4DA6-A940-3F0352D7692A}" dt="2026-04-28T07:32:20.669" v="55" actId="403"/>
+        <pc:spChg chg="add mod">
+          <ac:chgData name="Bastian Hymon" userId="6acb79db21e93a52" providerId="LiveId" clId="{AFD1EFC9-6E2C-4DA6-A940-3F0352D7692A}" dt="2026-04-30T05:41:26.363" v="757"/>
           <ac:spMkLst>
             <pc:docMk/>
-            <pc:sldMk cId="1874239562" sldId="264"/>
-            <ac:spMk id="4" creationId="{78365D44-A76D-3A83-2990-B2E34C65609B}"/>
+            <pc:sldMk cId="31810064" sldId="264"/>
+            <ac:spMk id="7" creationId="{14135DA5-A14B-2C6B-4215-A35F53D78898}"/>
+          </ac:spMkLst>
+        </pc:spChg>
+        <pc:spChg chg="add mod">
+          <ac:chgData name="Bastian Hymon" userId="6acb79db21e93a52" providerId="LiveId" clId="{AFD1EFC9-6E2C-4DA6-A940-3F0352D7692A}" dt="2026-04-30T05:42:45.454" v="773" actId="2711"/>
+          <ac:spMkLst>
+            <pc:docMk/>
+            <pc:sldMk cId="31810064" sldId="264"/>
+            <ac:spMk id="8" creationId="{AC840795-2EFC-DF03-943C-60282B422D21}"/>
           </ac:spMkLst>
         </pc:spChg>
       </pc:sldChg>
-      <pc:sldChg chg="modSp add mod">
-        <pc:chgData name="Bastian Hymon" userId="6acb79db21e93a52" providerId="LiveId" clId="{AFD1EFC9-6E2C-4DA6-A940-3F0352D7692A}" dt="2026-04-28T10:09:09.011" v="540" actId="20577"/>
+      <pc:sldChg chg="addSp delSp modSp add mod">
+        <pc:chgData name="Bastian Hymon" userId="6acb79db21e93a52" providerId="LiveId" clId="{AFD1EFC9-6E2C-4DA6-A940-3F0352D7692A}" dt="2026-04-30T05:52:19.638" v="1057" actId="166"/>
         <pc:sldMkLst>
           <pc:docMk/>
           <pc:sldMk cId="2559182033" sldId="265"/>
         </pc:sldMkLst>
+        <pc:spChg chg="mod ord">
+          <ac:chgData name="Bastian Hymon" userId="6acb79db21e93a52" providerId="LiveId" clId="{AFD1EFC9-6E2C-4DA6-A940-3F0352D7692A}" dt="2026-04-30T05:52:19.638" v="1057" actId="166"/>
+          <ac:spMkLst>
+            <pc:docMk/>
+            <pc:sldMk cId="2559182033" sldId="265"/>
+            <ac:spMk id="2" creationId="{E4D47998-9EB5-F33A-A33F-668EB7436760}"/>
+          </ac:spMkLst>
+        </pc:spChg>
         <pc:spChg chg="mod">
-          <ac:chgData name="Bastian Hymon" userId="6acb79db21e93a52" providerId="LiveId" clId="{AFD1EFC9-6E2C-4DA6-A940-3F0352D7692A}" dt="2026-04-28T07:52:03.493" v="420" actId="20577"/>
+          <ac:chgData name="Bastian Hymon" userId="6acb79db21e93a52" providerId="LiveId" clId="{AFD1EFC9-6E2C-4DA6-A940-3F0352D7692A}" dt="2026-04-30T05:43:07.322" v="786" actId="20577"/>
           <ac:spMkLst>
             <pc:docMk/>
             <pc:sldMk cId="2559182033" sldId="265"/>
@@ -467,20 +498,60 @@
           </ac:spMkLst>
         </pc:spChg>
         <pc:spChg chg="mod">
-          <ac:chgData name="Bastian Hymon" userId="6acb79db21e93a52" providerId="LiveId" clId="{AFD1EFC9-6E2C-4DA6-A940-3F0352D7692A}" dt="2026-04-28T10:09:09.011" v="540" actId="20577"/>
+          <ac:chgData name="Bastian Hymon" userId="6acb79db21e93a52" providerId="LiveId" clId="{AFD1EFC9-6E2C-4DA6-A940-3F0352D7692A}" dt="2026-04-30T05:43:12.878" v="803" actId="20577"/>
           <ac:spMkLst>
             <pc:docMk/>
             <pc:sldMk cId="2559182033" sldId="265"/>
             <ac:spMk id="5" creationId="{0F778CCF-8722-B664-A73C-79FC522F3725}"/>
           </ac:spMkLst>
         </pc:spChg>
+        <pc:spChg chg="del">
+          <ac:chgData name="Bastian Hymon" userId="6acb79db21e93a52" providerId="LiveId" clId="{AFD1EFC9-6E2C-4DA6-A940-3F0352D7692A}" dt="2026-04-30T05:43:22.805" v="804" actId="478"/>
+          <ac:spMkLst>
+            <pc:docMk/>
+            <pc:sldMk cId="2559182033" sldId="265"/>
+            <ac:spMk id="6" creationId="{9C6F9E4D-5C55-2BEE-5C6C-34FD78C0BAE9}"/>
+          </ac:spMkLst>
+        </pc:spChg>
+        <pc:spChg chg="add del mod">
+          <ac:chgData name="Bastian Hymon" userId="6acb79db21e93a52" providerId="LiveId" clId="{AFD1EFC9-6E2C-4DA6-A940-3F0352D7692A}" dt="2026-04-30T05:43:24.447" v="805" actId="478"/>
+          <ac:spMkLst>
+            <pc:docMk/>
+            <pc:sldMk cId="2559182033" sldId="265"/>
+            <ac:spMk id="8" creationId="{B4440A47-97F5-154F-DED6-6215B4D116F7}"/>
+          </ac:spMkLst>
+        </pc:spChg>
+        <pc:spChg chg="add mod">
+          <ac:chgData name="Bastian Hymon" userId="6acb79db21e93a52" providerId="LiveId" clId="{AFD1EFC9-6E2C-4DA6-A940-3F0352D7692A}" dt="2026-04-30T05:50:42.289" v="1020" actId="404"/>
+          <ac:spMkLst>
+            <pc:docMk/>
+            <pc:sldMk cId="2559182033" sldId="265"/>
+            <ac:spMk id="11" creationId="{54D827A4-8B21-5B34-D77F-61926B78546E}"/>
+          </ac:spMkLst>
+        </pc:spChg>
+        <pc:picChg chg="add mod modCrop">
+          <ac:chgData name="Bastian Hymon" userId="6acb79db21e93a52" providerId="LiveId" clId="{AFD1EFC9-6E2C-4DA6-A940-3F0352D7692A}" dt="2026-04-30T05:47:26.872" v="892" actId="732"/>
+          <ac:picMkLst>
+            <pc:docMk/>
+            <pc:sldMk cId="2559182033" sldId="265"/>
+            <ac:picMk id="10" creationId="{9467F380-45D8-AAF9-A66E-4BD76AB74F19}"/>
+          </ac:picMkLst>
+        </pc:picChg>
       </pc:sldChg>
       <pc:sldChg chg="modSp add mod">
-        <pc:chgData name="Bastian Hymon" userId="6acb79db21e93a52" providerId="LiveId" clId="{AFD1EFC9-6E2C-4DA6-A940-3F0352D7692A}" dt="2026-04-28T10:09:40.262" v="575" actId="20577"/>
+        <pc:chgData name="Bastian Hymon" userId="6acb79db21e93a52" providerId="LiveId" clId="{AFD1EFC9-6E2C-4DA6-A940-3F0352D7692A}" dt="2026-04-30T05:52:28.842" v="1059"/>
         <pc:sldMkLst>
           <pc:docMk/>
           <pc:sldMk cId="1546804968" sldId="266"/>
         </pc:sldMkLst>
+        <pc:spChg chg="mod">
+          <ac:chgData name="Bastian Hymon" userId="6acb79db21e93a52" providerId="LiveId" clId="{AFD1EFC9-6E2C-4DA6-A940-3F0352D7692A}" dt="2026-04-30T05:52:28.842" v="1059"/>
+          <ac:spMkLst>
+            <pc:docMk/>
+            <pc:sldMk cId="1546804968" sldId="266"/>
+            <ac:spMk id="2" creationId="{C9A1372D-ADE4-1A7F-E280-1E01D61683AB}"/>
+          </ac:spMkLst>
+        </pc:spChg>
         <pc:spChg chg="mod">
           <ac:chgData name="Bastian Hymon" userId="6acb79db21e93a52" providerId="LiveId" clId="{AFD1EFC9-6E2C-4DA6-A940-3F0352D7692A}" dt="2026-04-28T07:52:45.129" v="432" actId="20577"/>
           <ac:spMkLst>
@@ -499,11 +570,19 @@
         </pc:spChg>
       </pc:sldChg>
       <pc:sldChg chg="modSp add mod">
-        <pc:chgData name="Bastian Hymon" userId="6acb79db21e93a52" providerId="LiveId" clId="{AFD1EFC9-6E2C-4DA6-A940-3F0352D7692A}" dt="2026-04-28T10:09:57.614" v="606" actId="20577"/>
+        <pc:chgData name="Bastian Hymon" userId="6acb79db21e93a52" providerId="LiveId" clId="{AFD1EFC9-6E2C-4DA6-A940-3F0352D7692A}" dt="2026-04-30T05:52:34.940" v="1061"/>
         <pc:sldMkLst>
           <pc:docMk/>
           <pc:sldMk cId="1715821116" sldId="267"/>
         </pc:sldMkLst>
+        <pc:spChg chg="mod">
+          <ac:chgData name="Bastian Hymon" userId="6acb79db21e93a52" providerId="LiveId" clId="{AFD1EFC9-6E2C-4DA6-A940-3F0352D7692A}" dt="2026-04-30T05:52:34.940" v="1061"/>
+          <ac:spMkLst>
+            <pc:docMk/>
+            <pc:sldMk cId="1715821116" sldId="267"/>
+            <ac:spMk id="2" creationId="{BAA9C98E-E4EB-F578-B01E-B3AB861B42D9}"/>
+          </ac:spMkLst>
+        </pc:spChg>
         <pc:spChg chg="mod">
           <ac:chgData name="Bastian Hymon" userId="6acb79db21e93a52" providerId="LiveId" clId="{AFD1EFC9-6E2C-4DA6-A940-3F0352D7692A}" dt="2026-04-28T07:53:06.292" v="463" actId="20577"/>
           <ac:spMkLst>
@@ -522,11 +601,19 @@
         </pc:spChg>
       </pc:sldChg>
       <pc:sldChg chg="modSp add mod">
-        <pc:chgData name="Bastian Hymon" userId="6acb79db21e93a52" providerId="LiveId" clId="{AFD1EFC9-6E2C-4DA6-A940-3F0352D7692A}" dt="2026-04-28T10:10:21.107" v="635" actId="20577"/>
+        <pc:chgData name="Bastian Hymon" userId="6acb79db21e93a52" providerId="LiveId" clId="{AFD1EFC9-6E2C-4DA6-A940-3F0352D7692A}" dt="2026-04-30T05:52:47.393" v="1064"/>
         <pc:sldMkLst>
           <pc:docMk/>
           <pc:sldMk cId="3019394026" sldId="268"/>
         </pc:sldMkLst>
+        <pc:spChg chg="mod">
+          <ac:chgData name="Bastian Hymon" userId="6acb79db21e93a52" providerId="LiveId" clId="{AFD1EFC9-6E2C-4DA6-A940-3F0352D7692A}" dt="2026-04-30T05:52:47.393" v="1064"/>
+          <ac:spMkLst>
+            <pc:docMk/>
+            <pc:sldMk cId="3019394026" sldId="268"/>
+            <ac:spMk id="2" creationId="{F98F2AC9-B896-B7CF-6A2B-5F0928A2F1CD}"/>
+          </ac:spMkLst>
+        </pc:spChg>
         <pc:spChg chg="mod">
           <ac:chgData name="Bastian Hymon" userId="6acb79db21e93a52" providerId="LiveId" clId="{AFD1EFC9-6E2C-4DA6-A940-3F0352D7692A}" dt="2026-04-28T07:53:17.598" v="477" actId="20577"/>
           <ac:spMkLst>
@@ -545,11 +632,19 @@
         </pc:spChg>
       </pc:sldChg>
       <pc:sldChg chg="modSp add mod">
-        <pc:chgData name="Bastian Hymon" userId="6acb79db21e93a52" providerId="LiveId" clId="{AFD1EFC9-6E2C-4DA6-A940-3F0352D7692A}" dt="2026-04-28T07:53:31.654" v="485" actId="20577"/>
+        <pc:chgData name="Bastian Hymon" userId="6acb79db21e93a52" providerId="LiveId" clId="{AFD1EFC9-6E2C-4DA6-A940-3F0352D7692A}" dt="2026-04-30T05:52:53.874" v="1066"/>
         <pc:sldMkLst>
           <pc:docMk/>
           <pc:sldMk cId="1460475193" sldId="269"/>
         </pc:sldMkLst>
+        <pc:spChg chg="mod">
+          <ac:chgData name="Bastian Hymon" userId="6acb79db21e93a52" providerId="LiveId" clId="{AFD1EFC9-6E2C-4DA6-A940-3F0352D7692A}" dt="2026-04-30T05:52:53.874" v="1066"/>
+          <ac:spMkLst>
+            <pc:docMk/>
+            <pc:sldMk cId="1460475193" sldId="269"/>
+            <ac:spMk id="2" creationId="{2712F54A-BF25-3D51-0429-BAB69BC75382}"/>
+          </ac:spMkLst>
+        </pc:spChg>
         <pc:spChg chg="mod">
           <ac:chgData name="Bastian Hymon" userId="6acb79db21e93a52" providerId="LiveId" clId="{AFD1EFC9-6E2C-4DA6-A940-3F0352D7692A}" dt="2026-04-28T07:53:31.654" v="485" actId="20577"/>
           <ac:spMkLst>
@@ -560,11 +655,19 @@
         </pc:spChg>
       </pc:sldChg>
       <pc:sldChg chg="modSp add mod">
-        <pc:chgData name="Bastian Hymon" userId="6acb79db21e93a52" providerId="LiveId" clId="{AFD1EFC9-6E2C-4DA6-A940-3F0352D7692A}" dt="2026-04-28T07:53:49.015" v="500" actId="20577"/>
+        <pc:chgData name="Bastian Hymon" userId="6acb79db21e93a52" providerId="LiveId" clId="{AFD1EFC9-6E2C-4DA6-A940-3F0352D7692A}" dt="2026-04-30T05:52:57.535" v="1067"/>
         <pc:sldMkLst>
           <pc:docMk/>
           <pc:sldMk cId="1386034134" sldId="270"/>
         </pc:sldMkLst>
+        <pc:spChg chg="mod">
+          <ac:chgData name="Bastian Hymon" userId="6acb79db21e93a52" providerId="LiveId" clId="{AFD1EFC9-6E2C-4DA6-A940-3F0352D7692A}" dt="2026-04-30T05:52:57.535" v="1067"/>
+          <ac:spMkLst>
+            <pc:docMk/>
+            <pc:sldMk cId="1386034134" sldId="270"/>
+            <ac:spMk id="2" creationId="{8673C083-9454-ED12-4907-4A54B7661261}"/>
+          </ac:spMkLst>
+        </pc:spChg>
         <pc:spChg chg="mod">
           <ac:chgData name="Bastian Hymon" userId="6acb79db21e93a52" providerId="LiveId" clId="{AFD1EFC9-6E2C-4DA6-A940-3F0352D7692A}" dt="2026-04-28T07:53:49.015" v="500" actId="20577"/>
           <ac:spMkLst>
@@ -574,27 +677,75 @@
           </ac:spMkLst>
         </pc:spChg>
       </pc:sldChg>
-      <pc:sldChg chg="modSp add mod">
-        <pc:chgData name="Bastian Hymon" userId="6acb79db21e93a52" providerId="LiveId" clId="{AFD1EFC9-6E2C-4DA6-A940-3F0352D7692A}" dt="2026-04-28T10:09:21.968" v="561" actId="20577"/>
+      <pc:sldChg chg="addSp delSp modSp add mod">
+        <pc:chgData name="Bastian Hymon" userId="6acb79db21e93a52" providerId="LiveId" clId="{AFD1EFC9-6E2C-4DA6-A940-3F0352D7692A}" dt="2026-04-30T05:52:25.691" v="1058"/>
         <pc:sldMkLst>
           <pc:docMk/>
           <pc:sldMk cId="3202323658" sldId="271"/>
         </pc:sldMkLst>
         <pc:spChg chg="mod">
-          <ac:chgData name="Bastian Hymon" userId="6acb79db21e93a52" providerId="LiveId" clId="{AFD1EFC9-6E2C-4DA6-A940-3F0352D7692A}" dt="2026-04-28T10:09:21.968" v="561" actId="20577"/>
+          <ac:chgData name="Bastian Hymon" userId="6acb79db21e93a52" providerId="LiveId" clId="{AFD1EFC9-6E2C-4DA6-A940-3F0352D7692A}" dt="2026-04-30T05:52:25.691" v="1058"/>
+          <ac:spMkLst>
+            <pc:docMk/>
+            <pc:sldMk cId="3202323658" sldId="271"/>
+            <ac:spMk id="2" creationId="{C4F57091-50F7-CAA6-F3EA-7B520A606ECC}"/>
+          </ac:spMkLst>
+        </pc:spChg>
+        <pc:spChg chg="mod">
+          <ac:chgData name="Bastian Hymon" userId="6acb79db21e93a52" providerId="LiveId" clId="{AFD1EFC9-6E2C-4DA6-A940-3F0352D7692A}" dt="2026-04-30T05:47:37.344" v="906" actId="20577"/>
           <ac:spMkLst>
             <pc:docMk/>
             <pc:sldMk cId="3202323658" sldId="271"/>
             <ac:spMk id="5" creationId="{F6D4A5DC-F169-2BF1-C688-201A7962C2B8}"/>
           </ac:spMkLst>
         </pc:spChg>
+        <pc:spChg chg="add del mod">
+          <ac:chgData name="Bastian Hymon" userId="6acb79db21e93a52" providerId="LiveId" clId="{AFD1EFC9-6E2C-4DA6-A940-3F0352D7692A}" dt="2026-04-30T05:48:08.527" v="912"/>
+          <ac:spMkLst>
+            <pc:docMk/>
+            <pc:sldMk cId="3202323658" sldId="271"/>
+            <ac:spMk id="6" creationId="{3652BBD5-E06E-97F6-3B31-46DC9E37C0F8}"/>
+          </ac:spMkLst>
+        </pc:spChg>
+        <pc:spChg chg="add mod">
+          <ac:chgData name="Bastian Hymon" userId="6acb79db21e93a52" providerId="LiveId" clId="{AFD1EFC9-6E2C-4DA6-A940-3F0352D7692A}" dt="2026-04-30T05:48:07.425" v="910"/>
+          <ac:spMkLst>
+            <pc:docMk/>
+            <pc:sldMk cId="3202323658" sldId="271"/>
+            <ac:spMk id="7" creationId="{84FEA987-3ED8-63D0-2581-CFC08D93296F}"/>
+          </ac:spMkLst>
+        </pc:spChg>
+        <pc:spChg chg="add mod">
+          <ac:chgData name="Bastian Hymon" userId="6acb79db21e93a52" providerId="LiveId" clId="{AFD1EFC9-6E2C-4DA6-A940-3F0352D7692A}" dt="2026-04-30T05:50:10.339" v="1018" actId="20577"/>
+          <ac:spMkLst>
+            <pc:docMk/>
+            <pc:sldMk cId="3202323658" sldId="271"/>
+            <ac:spMk id="8" creationId="{B3DB61B0-298C-0D54-FC60-BD2CDD42633E}"/>
+          </ac:spMkLst>
+        </pc:spChg>
+        <pc:picChg chg="add mod modCrop">
+          <ac:chgData name="Bastian Hymon" userId="6acb79db21e93a52" providerId="LiveId" clId="{AFD1EFC9-6E2C-4DA6-A940-3F0352D7692A}" dt="2026-04-30T05:49:14.690" v="932" actId="1076"/>
+          <ac:picMkLst>
+            <pc:docMk/>
+            <pc:sldMk cId="3202323658" sldId="271"/>
+            <ac:picMk id="9" creationId="{432EABEE-6823-3222-C46A-FAC3187E06F1}"/>
+          </ac:picMkLst>
+        </pc:picChg>
       </pc:sldChg>
       <pc:sldChg chg="modSp add mod">
-        <pc:chgData name="Bastian Hymon" userId="6acb79db21e93a52" providerId="LiveId" clId="{AFD1EFC9-6E2C-4DA6-A940-3F0352D7692A}" dt="2026-04-28T10:09:45.199" v="588" actId="20577"/>
+        <pc:chgData name="Bastian Hymon" userId="6acb79db21e93a52" providerId="LiveId" clId="{AFD1EFC9-6E2C-4DA6-A940-3F0352D7692A}" dt="2026-04-30T05:52:31.808" v="1060"/>
         <pc:sldMkLst>
           <pc:docMk/>
           <pc:sldMk cId="2744335795" sldId="272"/>
         </pc:sldMkLst>
+        <pc:spChg chg="mod">
+          <ac:chgData name="Bastian Hymon" userId="6acb79db21e93a52" providerId="LiveId" clId="{AFD1EFC9-6E2C-4DA6-A940-3F0352D7692A}" dt="2026-04-30T05:52:31.808" v="1060"/>
+          <ac:spMkLst>
+            <pc:docMk/>
+            <pc:sldMk cId="2744335795" sldId="272"/>
+            <ac:spMk id="2" creationId="{4F6BB5E2-7096-5D36-00F5-6C981E9F856B}"/>
+          </ac:spMkLst>
+        </pc:spChg>
         <pc:spChg chg="mod">
           <ac:chgData name="Bastian Hymon" userId="6acb79db21e93a52" providerId="LiveId" clId="{AFD1EFC9-6E2C-4DA6-A940-3F0352D7692A}" dt="2026-04-28T10:09:45.199" v="588" actId="20577"/>
           <ac:spMkLst>
@@ -605,11 +756,19 @@
         </pc:spChg>
       </pc:sldChg>
       <pc:sldChg chg="modSp add mod">
-        <pc:chgData name="Bastian Hymon" userId="6acb79db21e93a52" providerId="LiveId" clId="{AFD1EFC9-6E2C-4DA6-A940-3F0352D7692A}" dt="2026-04-28T10:10:06.546" v="619" actId="20577"/>
+        <pc:chgData name="Bastian Hymon" userId="6acb79db21e93a52" providerId="LiveId" clId="{AFD1EFC9-6E2C-4DA6-A940-3F0352D7692A}" dt="2026-04-30T05:52:42.835" v="1062"/>
         <pc:sldMkLst>
           <pc:docMk/>
           <pc:sldMk cId="1471231054" sldId="273"/>
         </pc:sldMkLst>
+        <pc:spChg chg="mod">
+          <ac:chgData name="Bastian Hymon" userId="6acb79db21e93a52" providerId="LiveId" clId="{AFD1EFC9-6E2C-4DA6-A940-3F0352D7692A}" dt="2026-04-30T05:52:42.835" v="1062"/>
+          <ac:spMkLst>
+            <pc:docMk/>
+            <pc:sldMk cId="1471231054" sldId="273"/>
+            <ac:spMk id="2" creationId="{BBCE3C4C-9A37-7905-EA60-C8C5700D7A9A}"/>
+          </ac:spMkLst>
+        </pc:spChg>
         <pc:spChg chg="mod">
           <ac:chgData name="Bastian Hymon" userId="6acb79db21e93a52" providerId="LiveId" clId="{AFD1EFC9-6E2C-4DA6-A940-3F0352D7692A}" dt="2026-04-28T10:10:06.546" v="619" actId="20577"/>
           <ac:spMkLst>
@@ -620,17 +779,72 @@
         </pc:spChg>
       </pc:sldChg>
       <pc:sldChg chg="modSp add mod">
-        <pc:chgData name="Bastian Hymon" userId="6acb79db21e93a52" providerId="LiveId" clId="{AFD1EFC9-6E2C-4DA6-A940-3F0352D7692A}" dt="2026-04-28T10:10:30.872" v="658" actId="20577"/>
+        <pc:chgData name="Bastian Hymon" userId="6acb79db21e93a52" providerId="LiveId" clId="{AFD1EFC9-6E2C-4DA6-A940-3F0352D7692A}" dt="2026-04-30T05:52:50.957" v="1065"/>
         <pc:sldMkLst>
           <pc:docMk/>
           <pc:sldMk cId="1278402645" sldId="274"/>
         </pc:sldMkLst>
+        <pc:spChg chg="mod">
+          <ac:chgData name="Bastian Hymon" userId="6acb79db21e93a52" providerId="LiveId" clId="{AFD1EFC9-6E2C-4DA6-A940-3F0352D7692A}" dt="2026-04-30T05:52:50.957" v="1065"/>
+          <ac:spMkLst>
+            <pc:docMk/>
+            <pc:sldMk cId="1278402645" sldId="274"/>
+            <ac:spMk id="2" creationId="{4E63059F-7576-DDD9-0BF5-F0476AB78534}"/>
+          </ac:spMkLst>
+        </pc:spChg>
         <pc:spChg chg="mod">
           <ac:chgData name="Bastian Hymon" userId="6acb79db21e93a52" providerId="LiveId" clId="{AFD1EFC9-6E2C-4DA6-A940-3F0352D7692A}" dt="2026-04-28T10:10:30.872" v="658" actId="20577"/>
           <ac:spMkLst>
             <pc:docMk/>
             <pc:sldMk cId="1278402645" sldId="274"/>
             <ac:spMk id="5" creationId="{C83C6D7B-6F1B-33B2-A7A4-63FD68EACA79}"/>
+          </ac:spMkLst>
+        </pc:spChg>
+      </pc:sldChg>
+      <pc:sldChg chg="addSp delSp modSp add mod">
+        <pc:chgData name="Bastian Hymon" userId="6acb79db21e93a52" providerId="LiveId" clId="{AFD1EFC9-6E2C-4DA6-A940-3F0352D7692A}" dt="2026-04-30T05:53:39.333" v="1107" actId="1076"/>
+        <pc:sldMkLst>
+          <pc:docMk/>
+          <pc:sldMk cId="721059459" sldId="275"/>
+        </pc:sldMkLst>
+        <pc:spChg chg="mod">
+          <ac:chgData name="Bastian Hymon" userId="6acb79db21e93a52" providerId="LiveId" clId="{AFD1EFC9-6E2C-4DA6-A940-3F0352D7692A}" dt="2026-04-30T05:53:39.333" v="1107" actId="1076"/>
+          <ac:spMkLst>
+            <pc:docMk/>
+            <pc:sldMk cId="721059459" sldId="275"/>
+            <ac:spMk id="4" creationId="{7DD0B7EF-42B2-AE78-6120-9D139BD1CD8D}"/>
+          </ac:spMkLst>
+        </pc:spChg>
+        <pc:spChg chg="del">
+          <ac:chgData name="Bastian Hymon" userId="6acb79db21e93a52" providerId="LiveId" clId="{AFD1EFC9-6E2C-4DA6-A940-3F0352D7692A}" dt="2026-04-30T05:53:18.786" v="1087" actId="478"/>
+          <ac:spMkLst>
+            <pc:docMk/>
+            <pc:sldMk cId="721059459" sldId="275"/>
+            <ac:spMk id="5" creationId="{58B577A6-2E18-E7F6-20FF-648A50D917EB}"/>
+          </ac:spMkLst>
+        </pc:spChg>
+        <pc:spChg chg="del">
+          <ac:chgData name="Bastian Hymon" userId="6acb79db21e93a52" providerId="LiveId" clId="{AFD1EFC9-6E2C-4DA6-A940-3F0352D7692A}" dt="2026-04-30T05:53:23.900" v="1089" actId="478"/>
+          <ac:spMkLst>
+            <pc:docMk/>
+            <pc:sldMk cId="721059459" sldId="275"/>
+            <ac:spMk id="6" creationId="{D634E9C9-A1AB-B166-C56E-18D2D6173CD8}"/>
+          </ac:spMkLst>
+        </pc:spChg>
+        <pc:spChg chg="add del mod">
+          <ac:chgData name="Bastian Hymon" userId="6acb79db21e93a52" providerId="LiveId" clId="{AFD1EFC9-6E2C-4DA6-A940-3F0352D7692A}" dt="2026-04-30T05:53:20.881" v="1088" actId="478"/>
+          <ac:spMkLst>
+            <pc:docMk/>
+            <pc:sldMk cId="721059459" sldId="275"/>
+            <ac:spMk id="8" creationId="{CF7E926A-B039-7E0E-172C-6EFF9FD78AD1}"/>
+          </ac:spMkLst>
+        </pc:spChg>
+        <pc:spChg chg="add del mod">
+          <ac:chgData name="Bastian Hymon" userId="6acb79db21e93a52" providerId="LiveId" clId="{AFD1EFC9-6E2C-4DA6-A940-3F0352D7692A}" dt="2026-04-30T05:53:25.257" v="1090" actId="478"/>
+          <ac:spMkLst>
+            <pc:docMk/>
+            <pc:sldMk cId="721059459" sldId="275"/>
+            <ac:spMk id="10" creationId="{1E3E5098-8413-5CB6-315D-0239296C2E21}"/>
           </ac:spMkLst>
         </pc:spChg>
       </pc:sldChg>
@@ -748,7 +962,7 @@
           <a:p>
             <a:fld id="{C48B1069-75E4-459F-81E7-F12BB487B326}" type="datetimeFigureOut">
               <a:rPr lang="de-DE" smtClean="0"/>
-              <a:t>28.04.2026</a:t>
+              <a:t>30.04.2026</a:t>
             </a:fld>
             <a:endParaRPr lang="de-DE"/>
           </a:p>
@@ -925,7 +1139,7 @@
           <a:p>
             <a:fld id="{4BA2E619-BF61-4444-8A30-4D976D0E5E7E}" type="datetimeFigureOut">
               <a:rPr lang="de-DE" smtClean="0"/>
-              <a:t>28.04.2026</a:t>
+              <a:t>30.04.2026</a:t>
             </a:fld>
             <a:endParaRPr lang="de-DE"/>
           </a:p>
@@ -11772,24 +11986,24 @@
       </p:sp>
       <p:sp>
         <p:nvSpPr>
-          <p:cNvPr id="4" name="Textplatzhalter 3">
-            <a:extLst>
-              <a:ext uri="{FF2B5EF4-FFF2-40B4-BE49-F238E27FC236}">
-                <a16:creationId xmlns:a16="http://schemas.microsoft.com/office/drawing/2014/main" id="{EFA8503C-1687-F9CF-75A6-441253ECCF6C}"/>
-              </a:ext>
-            </a:extLst>
-          </p:cNvPr>
-          <p:cNvSpPr>
-            <a:spLocks noGrp="1"/>
-          </p:cNvSpPr>
-          <p:nvPr>
-            <p:ph type="body" sz="quarter" idx="14"/>
-          </p:nvPr>
-        </p:nvSpPr>
-        <p:spPr>
-          <a:xfrm>
-            <a:off x="0" y="5853113"/>
-            <a:ext cx="10007413" cy="639762"/>
+          <p:cNvPr id="5" name="Fußzeilenplatzhalter 4">
+            <a:extLst>
+              <a:ext uri="{FF2B5EF4-FFF2-40B4-BE49-F238E27FC236}">
+                <a16:creationId xmlns:a16="http://schemas.microsoft.com/office/drawing/2014/main" id="{FECDA5A2-B2BF-473D-A67B-E1B62D4B72E9}"/>
+              </a:ext>
+            </a:extLst>
+          </p:cNvPr>
+          <p:cNvSpPr>
+            <a:spLocks noGrp="1"/>
+          </p:cNvSpPr>
+          <p:nvPr>
+            <p:ph type="ftr" sz="quarter" idx="15"/>
+          </p:nvPr>
+        </p:nvSpPr>
+        <p:spPr>
+          <a:xfrm>
+            <a:off x="613834" y="6492875"/>
+            <a:ext cx="10007413" cy="365125"/>
           </a:xfrm>
         </p:spPr>
         <p:txBody>
@@ -11797,36 +12011,8 @@
           <a:lstStyle/>
           <a:p>
             <a:r>
-              <a:rPr lang="de-DE" sz="1400" dirty="0"/>
-              <a:t>Christopher Liebl, Benedikt Buttenmüller, Simon Lamprecht, Johannes Lange, Tom Weigel, Bastian Hymon </a:t>
-            </a:r>
-          </a:p>
-        </p:txBody>
-      </p:sp>
-      <p:sp>
-        <p:nvSpPr>
-          <p:cNvPr id="5" name="Fußzeilenplatzhalter 4">
-            <a:extLst>
-              <a:ext uri="{FF2B5EF4-FFF2-40B4-BE49-F238E27FC236}">
-                <a16:creationId xmlns:a16="http://schemas.microsoft.com/office/drawing/2014/main" id="{FECDA5A2-B2BF-473D-A67B-E1B62D4B72E9}"/>
-              </a:ext>
-            </a:extLst>
-          </p:cNvPr>
-          <p:cNvSpPr>
-            <a:spLocks noGrp="1"/>
-          </p:cNvSpPr>
-          <p:nvPr>
-            <p:ph type="ftr" sz="quarter" idx="15"/>
-          </p:nvPr>
-        </p:nvSpPr>
-        <p:spPr/>
-        <p:txBody>
-          <a:bodyPr/>
-          <a:lstStyle/>
-          <a:p>
-            <a:r>
               <a:rPr lang="de-DE" dirty="0"/>
-              <a:t>Organisationseinheit | Autorin/Autor | Name der Veranstaltung/Vorlesung</a:t>
+              <a:t>IM | Christopher Liebl, Benedikt Buttenmüller, Simon Lamprecht, Johannes Lange, Tom Weigel, Bastian Hymon | KI-Projekt</a:t>
             </a:r>
           </a:p>
         </p:txBody>
@@ -11950,10 +12136,9 @@
           <a:lstStyle/>
           <a:p>
             <a:r>
-              <a:rPr lang="de-DE"/>
-              <a:t>Organisationseinheit | Autorin/Autor | Name der Veranstaltung/Vorlesung</a:t>
-            </a:r>
-            <a:endParaRPr lang="de-DE" dirty="0"/>
+              <a:rPr lang="de-DE" dirty="0"/>
+              <a:t>IM | Christopher Liebl, Benedikt Buttenmüller, Simon Lamprecht, Johannes Lange, Tom Weigel, Bastian Hymon | KI-Projekt</a:t>
+            </a:r>
           </a:p>
         </p:txBody>
       </p:sp>
@@ -12129,10 +12314,9 @@
           <a:lstStyle/>
           <a:p>
             <a:r>
-              <a:rPr lang="de-DE"/>
-              <a:t>Organisationseinheit | Autorin/Autor | Name der Veranstaltung/Vorlesung</a:t>
-            </a:r>
-            <a:endParaRPr lang="de-DE" dirty="0"/>
+              <a:rPr lang="de-DE" dirty="0"/>
+              <a:t>IM | Christopher Liebl, Benedikt Buttenmüller, Simon Lamprecht, Johannes Lange, Tom Weigel, Bastian Hymon | KI-Projekt</a:t>
+            </a:r>
           </a:p>
         </p:txBody>
       </p:sp>
@@ -12309,10 +12493,9 @@
           <a:lstStyle/>
           <a:p>
             <a:r>
-              <a:rPr lang="de-DE"/>
-              <a:t>Organisationseinheit | Autorin/Autor | Name der Veranstaltung/Vorlesung</a:t>
-            </a:r>
-            <a:endParaRPr lang="de-DE" dirty="0"/>
+              <a:rPr lang="de-DE" dirty="0"/>
+              <a:t>IM | Christopher Liebl, Benedikt Buttenmüller, Simon Lamprecht, Johannes Lange, Tom Weigel, Bastian Hymon | KI-Projekt</a:t>
+            </a:r>
           </a:p>
         </p:txBody>
       </p:sp>
@@ -12488,10 +12671,9 @@
           <a:lstStyle/>
           <a:p>
             <a:r>
-              <a:rPr lang="de-DE"/>
-              <a:t>Organisationseinheit | Autorin/Autor | Name der Veranstaltung/Vorlesung</a:t>
-            </a:r>
-            <a:endParaRPr lang="de-DE" dirty="0"/>
+              <a:rPr lang="de-DE" dirty="0"/>
+              <a:t>IM | Christopher Liebl, Benedikt Buttenmüller, Simon Lamprecht, Johannes Lange, Tom Weigel, Bastian Hymon | KI-Projekt</a:t>
+            </a:r>
           </a:p>
         </p:txBody>
       </p:sp>
@@ -12627,7 +12809,13 @@
   <p:cSld>
     <p:spTree>
       <p:nvGrpSpPr>
-        <p:cNvPr id="1" name=""/>
+        <p:cNvPr id="1" name="">
+          <a:extLst>
+            <a:ext uri="{FF2B5EF4-FFF2-40B4-BE49-F238E27FC236}">
+              <a16:creationId xmlns:a16="http://schemas.microsoft.com/office/drawing/2014/main" id="{586DD89F-FE83-C01B-DA4D-106CA5F29AFD}"/>
+            </a:ext>
+          </a:extLst>
+        </p:cNvPr>
         <p:cNvGrpSpPr/>
         <p:nvPr/>
       </p:nvGrpSpPr>
@@ -12641,18 +12829,18 @@
       </p:grpSpPr>
       <p:sp>
         <p:nvSpPr>
-          <p:cNvPr id="2" name="Textplatzhalter 1">
-            <a:extLst>
-              <a:ext uri="{FF2B5EF4-FFF2-40B4-BE49-F238E27FC236}">
-                <a16:creationId xmlns:a16="http://schemas.microsoft.com/office/drawing/2014/main" id="{26DF4B18-6E4A-B8AF-4C30-F8C9C4D5E972}"/>
-              </a:ext>
-            </a:extLst>
-          </p:cNvPr>
-          <p:cNvSpPr>
-            <a:spLocks noGrp="1"/>
-          </p:cNvSpPr>
-          <p:nvPr>
-            <p:ph type="body" sz="quarter" idx="14"/>
+          <p:cNvPr id="2" name="Fußzeilenplatzhalter 1">
+            <a:extLst>
+              <a:ext uri="{FF2B5EF4-FFF2-40B4-BE49-F238E27FC236}">
+                <a16:creationId xmlns:a16="http://schemas.microsoft.com/office/drawing/2014/main" id="{141FA9CF-5ECF-0107-A6D2-2112ECE64278}"/>
+              </a:ext>
+            </a:extLst>
+          </p:cNvPr>
+          <p:cNvSpPr>
+            <a:spLocks noGrp="1"/>
+          </p:cNvSpPr>
+          <p:nvPr>
+            <p:ph type="ftr" sz="quarter" idx="26"/>
           </p:nvPr>
         </p:nvSpPr>
         <p:spPr/>
@@ -12662,48 +12850,17 @@
           <a:p>
             <a:r>
               <a:rPr lang="de-DE" dirty="0"/>
-              <a:t>Stabsstelle Kommunikation</a:t>
-            </a:r>
-          </a:p>
-          <a:p>
-            <a:endParaRPr lang="de-DE" dirty="0"/>
-          </a:p>
-        </p:txBody>
-      </p:sp>
-      <p:sp>
-        <p:nvSpPr>
-          <p:cNvPr id="3" name="Fußzeilenplatzhalter 2">
-            <a:extLst>
-              <a:ext uri="{FF2B5EF4-FFF2-40B4-BE49-F238E27FC236}">
-                <a16:creationId xmlns:a16="http://schemas.microsoft.com/office/drawing/2014/main" id="{951755B3-D6D0-0BDE-01FC-40B3DB5F0E9E}"/>
-              </a:ext>
-            </a:extLst>
-          </p:cNvPr>
-          <p:cNvSpPr>
-            <a:spLocks noGrp="1"/>
-          </p:cNvSpPr>
-          <p:nvPr>
-            <p:ph type="ftr" sz="quarter" idx="26"/>
-          </p:nvPr>
-        </p:nvSpPr>
-        <p:spPr/>
-        <p:txBody>
-          <a:bodyPr/>
-          <a:lstStyle/>
-          <a:p>
-            <a:r>
-              <a:rPr lang="de-DE" dirty="0"/>
-              <a:t>Organisationseinheit | Autorin/Autor | Name der Veranstaltung/Vorlesung</a:t>
-            </a:r>
-          </a:p>
-        </p:txBody>
-      </p:sp>
-      <p:sp>
-        <p:nvSpPr>
-          <p:cNvPr id="4" name="Foliennummernplatzhalter 3">
-            <a:extLst>
-              <a:ext uri="{FF2B5EF4-FFF2-40B4-BE49-F238E27FC236}">
-                <a16:creationId xmlns:a16="http://schemas.microsoft.com/office/drawing/2014/main" id="{C6C5996F-6B19-3176-B1A5-177D23732D8E}"/>
+              <a:t>IM | Christopher Liebl, Benedikt Buttenmüller, Simon Lamprecht, Johannes Lange, Tom Weigel, Bastian Hymon | KI-Projekt</a:t>
+            </a:r>
+          </a:p>
+        </p:txBody>
+      </p:sp>
+      <p:sp>
+        <p:nvSpPr>
+          <p:cNvPr id="3" name="Foliennummernplatzhalter 2">
+            <a:extLst>
+              <a:ext uri="{FF2B5EF4-FFF2-40B4-BE49-F238E27FC236}">
+                <a16:creationId xmlns:a16="http://schemas.microsoft.com/office/drawing/2014/main" id="{89E9A53F-8EE4-D00B-08D9-ADE3ED1B2D90}"/>
               </a:ext>
             </a:extLst>
           </p:cNvPr>
@@ -12730,10 +12887,10 @@
       </p:sp>
       <p:sp>
         <p:nvSpPr>
-          <p:cNvPr id="5" name="Textplatzhalter 4">
-            <a:extLst>
-              <a:ext uri="{FF2B5EF4-FFF2-40B4-BE49-F238E27FC236}">
-                <a16:creationId xmlns:a16="http://schemas.microsoft.com/office/drawing/2014/main" id="{A07147D1-2036-95F4-774C-93DDF337863C}"/>
+          <p:cNvPr id="4" name="Textplatzhalter 3">
+            <a:extLst>
+              <a:ext uri="{FF2B5EF4-FFF2-40B4-BE49-F238E27FC236}">
+                <a16:creationId xmlns:a16="http://schemas.microsoft.com/office/drawing/2014/main" id="{7DD0B7EF-42B2-AE78-6120-9D139BD1CD8D}"/>
               </a:ext>
             </a:extLst>
           </p:cNvPr>
@@ -12744,155 +12901,27 @@
             <p:ph type="body" sz="quarter" idx="13"/>
           </p:nvPr>
         </p:nvSpPr>
-        <p:spPr/>
+        <p:spPr>
+          <a:xfrm>
+            <a:off x="747877" y="746012"/>
+            <a:ext cx="10119053" cy="468000"/>
+          </a:xfrm>
+        </p:spPr>
         <p:txBody>
           <a:bodyPr/>
           <a:lstStyle/>
           <a:p>
-            <a:endParaRPr lang="de-DE" dirty="0"/>
-          </a:p>
-        </p:txBody>
-      </p:sp>
-      <p:sp>
-        <p:nvSpPr>
-          <p:cNvPr id="6" name="Textplatzhalter 5">
-            <a:extLst>
-              <a:ext uri="{FF2B5EF4-FFF2-40B4-BE49-F238E27FC236}">
-                <a16:creationId xmlns:a16="http://schemas.microsoft.com/office/drawing/2014/main" id="{E8FB1FE0-8CCF-260D-D940-384FF80C15B6}"/>
-              </a:ext>
-            </a:extLst>
-          </p:cNvPr>
-          <p:cNvSpPr>
-            <a:spLocks noGrp="1"/>
-          </p:cNvSpPr>
-          <p:nvPr>
-            <p:ph type="body" sz="quarter" idx="25"/>
-          </p:nvPr>
-        </p:nvSpPr>
-        <p:spPr/>
-        <p:txBody>
-          <a:bodyPr/>
-          <a:lstStyle/>
-          <a:p>
             <a:r>
               <a:rPr lang="de-DE" dirty="0"/>
-              <a:t>Bitte wenden Sie sich bei Fragen an uns</a:t>
-            </a:r>
-          </a:p>
-          <a:p>
-            <a:endParaRPr lang="de-DE" dirty="0"/>
-          </a:p>
-        </p:txBody>
-      </p:sp>
-      <p:sp>
-        <p:nvSpPr>
-          <p:cNvPr id="7" name="Textplatzhalter 6">
-            <a:extLst>
-              <a:ext uri="{FF2B5EF4-FFF2-40B4-BE49-F238E27FC236}">
-                <a16:creationId xmlns:a16="http://schemas.microsoft.com/office/drawing/2014/main" id="{ED506ADA-D51D-0F47-C6FF-2523D3DFC682}"/>
-              </a:ext>
-            </a:extLst>
-          </p:cNvPr>
-          <p:cNvSpPr>
-            <a:spLocks noGrp="1"/>
-          </p:cNvSpPr>
-          <p:nvPr>
-            <p:ph type="body" sz="quarter" idx="27"/>
-          </p:nvPr>
-        </p:nvSpPr>
-        <p:spPr/>
-        <p:txBody>
-          <a:bodyPr/>
-          <a:lstStyle/>
-          <a:p>
-            <a:r>
-              <a:rPr lang="de-DE" dirty="0"/>
-              <a:t>-</a:t>
-            </a:r>
-          </a:p>
-        </p:txBody>
-      </p:sp>
-      <p:sp>
-        <p:nvSpPr>
-          <p:cNvPr id="8" name="Textplatzhalter 7">
-            <a:extLst>
-              <a:ext uri="{FF2B5EF4-FFF2-40B4-BE49-F238E27FC236}">
-                <a16:creationId xmlns:a16="http://schemas.microsoft.com/office/drawing/2014/main" id="{60FF552A-A38F-6D61-A136-653E08D20C73}"/>
-              </a:ext>
-            </a:extLst>
-          </p:cNvPr>
-          <p:cNvSpPr>
-            <a:spLocks noGrp="1"/>
-          </p:cNvSpPr>
-          <p:nvPr>
-            <p:ph type="body" sz="quarter" idx="28"/>
-          </p:nvPr>
-        </p:nvSpPr>
-        <p:spPr/>
-        <p:txBody>
-          <a:bodyPr/>
-          <a:lstStyle/>
-          <a:p>
-            <a:r>
-              <a:rPr lang="de-DE" dirty="0" err="1"/>
-              <a:t>Seybothstraße</a:t>
-            </a:r>
-            <a:r>
-              <a:rPr lang="de-DE" dirty="0"/>
-              <a:t> 2</a:t>
-            </a:r>
-          </a:p>
-          <a:p>
-            <a:r>
-              <a:rPr lang="de-DE" dirty="0"/>
-              <a:t>93053 Regensburg</a:t>
-            </a:r>
-          </a:p>
-          <a:p>
-            <a:endParaRPr lang="de-DE" dirty="0"/>
-          </a:p>
-        </p:txBody>
-      </p:sp>
-      <p:sp>
-        <p:nvSpPr>
-          <p:cNvPr id="9" name="Textplatzhalter 8">
-            <a:extLst>
-              <a:ext uri="{FF2B5EF4-FFF2-40B4-BE49-F238E27FC236}">
-                <a16:creationId xmlns:a16="http://schemas.microsoft.com/office/drawing/2014/main" id="{B938A625-4C84-E31C-2D1C-B2221751D30F}"/>
-              </a:ext>
-            </a:extLst>
-          </p:cNvPr>
-          <p:cNvSpPr>
-            <a:spLocks noGrp="1"/>
-          </p:cNvSpPr>
-          <p:nvPr>
-            <p:ph type="body" sz="quarter" idx="29"/>
-          </p:nvPr>
-        </p:nvSpPr>
-        <p:spPr>
-          <a:xfrm>
-            <a:off x="2248392" y="4513899"/>
-            <a:ext cx="3600000" cy="408495"/>
-          </a:xfrm>
-        </p:spPr>
-        <p:txBody>
-          <a:bodyPr/>
-          <a:lstStyle/>
-          <a:p>
-            <a:r>
-              <a:rPr lang="de-DE" dirty="0"/>
-              <a:t>kommunikation@oth-regensburg.de</a:t>
-            </a:r>
-          </a:p>
-          <a:p>
-            <a:endParaRPr lang="de-DE" dirty="0"/>
+              <a:t>Offene Fragen?</a:t>
+            </a:r>
           </a:p>
         </p:txBody>
       </p:sp>
     </p:spTree>
     <p:extLst>
       <p:ext uri="{BB962C8B-B14F-4D97-AF65-F5344CB8AC3E}">
-        <p14:creationId xmlns:p14="http://schemas.microsoft.com/office/powerpoint/2010/main" val="44672609"/>
+        <p14:creationId xmlns:p14="http://schemas.microsoft.com/office/powerpoint/2010/main" val="721059459"/>
       </p:ext>
     </p:extLst>
   </p:cSld>
@@ -12942,7 +12971,7 @@
           <a:p>
             <a:r>
               <a:rPr lang="de-DE" dirty="0"/>
-              <a:t>Architektur</a:t>
+              <a:t>Problembeschreibung</a:t>
             </a:r>
           </a:p>
         </p:txBody>
@@ -12969,12 +12998,8 @@
           <a:lstStyle/>
           <a:p>
             <a:r>
-              <a:rPr lang="de-DE" dirty="0" err="1"/>
-              <a:t>UseCase</a:t>
-            </a:r>
-            <a:r>
               <a:rPr lang="de-DE" dirty="0"/>
-              <a:t> Agent</a:t>
+              <a:t>Architektur</a:t>
             </a:r>
           </a:p>
         </p:txBody>
@@ -13002,7 +13027,7 @@
           <a:p>
             <a:r>
               <a:rPr lang="de-DE" dirty="0"/>
-              <a:t>Modelling Agent</a:t>
+              <a:t>Agents</a:t>
             </a:r>
           </a:p>
         </p:txBody>
@@ -13030,15 +13055,7 @@
           <a:p>
             <a:r>
               <a:rPr lang="de-DE" dirty="0"/>
-              <a:t>Data-</a:t>
-            </a:r>
-            <a:r>
-              <a:rPr lang="de-DE" dirty="0" err="1"/>
-              <a:t>Preprocessing</a:t>
-            </a:r>
-            <a:r>
-              <a:rPr lang="de-DE" dirty="0"/>
-              <a:t> Agent</a:t>
+              <a:t>GUI</a:t>
             </a:r>
           </a:p>
         </p:txBody>
@@ -13066,7 +13083,7 @@
           <a:p>
             <a:r>
               <a:rPr lang="de-DE" dirty="0"/>
-              <a:t>Scripting Agent</a:t>
+              <a:t>Ausblick</a:t>
             </a:r>
           </a:p>
         </p:txBody>
@@ -13094,7 +13111,7 @@
           <a:p>
             <a:r>
               <a:rPr lang="de-DE" dirty="0"/>
-              <a:t>GUI und Ausblick</a:t>
+              <a:t>…</a:t>
             </a:r>
           </a:p>
         </p:txBody>
@@ -13121,10 +13138,9 @@
           <a:lstStyle/>
           <a:p>
             <a:r>
-              <a:rPr lang="de-DE"/>
-              <a:t>Organisationseinheit | Autorin/Autor | Name der Veranstaltung/Vorlesung</a:t>
-            </a:r>
-            <a:endParaRPr lang="de-DE" dirty="0"/>
+              <a:rPr lang="de-DE" dirty="0"/>
+              <a:t>IM | Christopher Liebl, Benedikt Buttenmüller, Simon Lamprecht, Johannes Lange, Tom Weigel, Bastian Hymon | KI-Projekt</a:t>
+            </a:r>
           </a:p>
         </p:txBody>
       </p:sp>
@@ -13348,9 +13364,10 @@
           <a:lstStyle/>
           <a:p>
             <a:r>
-              <a:rPr lang="de-DE" dirty="0"/>
-              <a:t>Texpromting</a:t>
-            </a:r>
+              <a:rPr lang="de-DE"/>
+              <a:t>KI-Projekt Texpromting</a:t>
+            </a:r>
+            <a:endParaRPr lang="de-DE" dirty="0"/>
           </a:p>
         </p:txBody>
       </p:sp>
@@ -13434,10 +13451,9 @@
           <a:lstStyle/>
           <a:p>
             <a:r>
-              <a:rPr lang="de-DE"/>
-              <a:t>Organisationseinheit | Autorin/Autor | Name der Veranstaltung/Vorlesung</a:t>
-            </a:r>
-            <a:endParaRPr lang="de-DE" dirty="0"/>
+              <a:rPr lang="de-DE" dirty="0"/>
+              <a:t>IM | Christopher Liebl, Benedikt Buttenmüller, Simon Lamprecht, Johannes Lange, Tom Weigel, Bastian Hymon | KI-Projekt</a:t>
+            </a:r>
           </a:p>
         </p:txBody>
       </p:sp>
@@ -13494,7 +13510,7 @@
           <a:p>
             <a:r>
               <a:rPr lang="de-DE" dirty="0"/>
-              <a:t>Architektur</a:t>
+              <a:t>Problembeschreibung</a:t>
             </a:r>
           </a:p>
         </p:txBody>
@@ -13529,28 +13545,353 @@
       </p:sp>
       <p:sp>
         <p:nvSpPr>
-          <p:cNvPr id="6" name="Textplatzhalter 5">
-            <a:extLst>
-              <a:ext uri="{FF2B5EF4-FFF2-40B4-BE49-F238E27FC236}">
-                <a16:creationId xmlns:a16="http://schemas.microsoft.com/office/drawing/2014/main" id="{6881F226-370F-5927-67AA-42EF64B0D7BF}"/>
-              </a:ext>
-            </a:extLst>
-          </p:cNvPr>
-          <p:cNvSpPr>
-            <a:spLocks noGrp="1"/>
+          <p:cNvPr id="8" name="Rectangle 2">
+            <a:extLst>
+              <a:ext uri="{FF2B5EF4-FFF2-40B4-BE49-F238E27FC236}">
+                <a16:creationId xmlns:a16="http://schemas.microsoft.com/office/drawing/2014/main" id="{AC840795-2EFC-DF03-943C-60282B422D21}"/>
+              </a:ext>
+            </a:extLst>
+          </p:cNvPr>
+          <p:cNvSpPr>
+            <a:spLocks noGrp="1" noChangeArrowheads="1"/>
           </p:cNvSpPr>
           <p:nvPr>
             <p:ph type="body" sz="quarter" idx="16"/>
           </p:nvPr>
         </p:nvSpPr>
-        <p:spPr/>
-        <p:txBody>
-          <a:bodyPr/>
+        <p:spPr bwMode="auto">
+          <a:xfrm>
+            <a:off x="613834" y="1824558"/>
+            <a:ext cx="8638903" cy="3785652"/>
+          </a:xfrm>
+          <a:prstGeom prst="rect">
+            <a:avLst/>
+          </a:prstGeom>
+          <a:noFill/>
+          <a:ln>
+            <a:noFill/>
+          </a:ln>
+          <a:effectLst/>
+          <a:extLst>
+            <a:ext uri="{909E8E84-426E-40DD-AFC4-6F175D3DCCD1}">
+              <a14:hiddenFill xmlns:a14="http://schemas.microsoft.com/office/drawing/2010/main">
+                <a:solidFill>
+                  <a:schemeClr val="accent1"/>
+                </a:solidFill>
+              </a14:hiddenFill>
+            </a:ext>
+            <a:ext uri="{91240B29-F687-4F45-9708-019B960494DF}">
+              <a14:hiddenLine xmlns:a14="http://schemas.microsoft.com/office/drawing/2010/main" w="9525">
+                <a:solidFill>
+                  <a:schemeClr val="tx1"/>
+                </a:solidFill>
+                <a:miter lim="800000"/>
+                <a:headEnd/>
+                <a:tailEnd/>
+              </a14:hiddenLine>
+            </a:ext>
+            <a:ext uri="{AF507438-7753-43E0-B8FC-AC1667EBCBE1}">
+              <a14:hiddenEffects xmlns:a14="http://schemas.microsoft.com/office/drawing/2010/main">
+                <a:effectLst>
+                  <a:outerShdw dist="35921" dir="2700000" algn="ctr" rotWithShape="0">
+                    <a:schemeClr val="bg2"/>
+                  </a:outerShdw>
+                </a:effectLst>
+              </a14:hiddenEffects>
+            </a:ext>
+          </a:extLst>
+        </p:spPr>
+        <p:txBody>
+          <a:bodyPr vert="horz" wrap="none" lIns="91440" tIns="45720" rIns="91440" bIns="45720" numCol="1" anchor="ctr" anchorCtr="0" compatLnSpc="1">
+            <a:prstTxWarp prst="textNoShape">
+              <a:avLst/>
+            </a:prstTxWarp>
+            <a:spAutoFit/>
+          </a:bodyPr>
           <a:lstStyle/>
           <a:p>
-            <a:r>
-              <a:rPr lang="de-DE" dirty="0"/>
-              <a:t>…</a:t>
+            <a:pPr marL="0" marR="0" lvl="0" indent="0" algn="l" defTabSz="914400" rtl="0" eaLnBrk="0" fontAlgn="base" latinLnBrk="0" hangingPunct="0">
+              <a:lnSpc>
+                <a:spcPct val="100000"/>
+              </a:lnSpc>
+              <a:spcBef>
+                <a:spcPct val="0"/>
+              </a:spcBef>
+              <a:spcAft>
+                <a:spcPct val="0"/>
+              </a:spcAft>
+              <a:buClrTx/>
+              <a:buSzTx/>
+              <a:buFontTx/>
+              <a:buNone/>
+              <a:tabLst/>
+            </a:pPr>
+            <a:endParaRPr kumimoji="0" lang="de-DE" altLang="de-DE" sz="2400" b="1" i="0" u="none" strike="noStrike" cap="none" normalizeH="0" baseline="0" dirty="0">
+              <a:ln>
+                <a:noFill/>
+              </a:ln>
+              <a:solidFill>
+                <a:schemeClr val="tx1"/>
+              </a:solidFill>
+              <a:effectLst/>
+            </a:endParaRPr>
+          </a:p>
+          <a:p>
+            <a:pPr marL="0" marR="0" lvl="0" indent="0" algn="l" defTabSz="914400" rtl="0" eaLnBrk="0" fontAlgn="base" latinLnBrk="0" hangingPunct="0">
+              <a:lnSpc>
+                <a:spcPct val="100000"/>
+              </a:lnSpc>
+              <a:spcBef>
+                <a:spcPct val="0"/>
+              </a:spcBef>
+              <a:spcAft>
+                <a:spcPct val="0"/>
+              </a:spcAft>
+              <a:buClrTx/>
+              <a:buSzTx/>
+              <a:buFontTx/>
+              <a:buChar char="•"/>
+              <a:tabLst/>
+            </a:pPr>
+            <a:r>
+              <a:rPr kumimoji="0" lang="de-DE" altLang="de-DE" sz="2400" b="1" i="0" u="none" strike="noStrike" cap="none" normalizeH="0" baseline="0" dirty="0">
+                <a:ln>
+                  <a:noFill/>
+                </a:ln>
+                <a:solidFill>
+                  <a:schemeClr val="tx1"/>
+                </a:solidFill>
+                <a:effectLst/>
+              </a:rPr>
+              <a:t>Produktionsdaten vorhanden, aber kaum genutzt </a:t>
+            </a:r>
+          </a:p>
+          <a:p>
+            <a:pPr marL="0" marR="0" lvl="0" indent="0" algn="l" defTabSz="914400" rtl="0" eaLnBrk="0" fontAlgn="base" latinLnBrk="0" hangingPunct="0">
+              <a:lnSpc>
+                <a:spcPct val="100000"/>
+              </a:lnSpc>
+              <a:spcBef>
+                <a:spcPct val="0"/>
+              </a:spcBef>
+              <a:spcAft>
+                <a:spcPct val="0"/>
+              </a:spcAft>
+              <a:buClrTx/>
+              <a:buSzTx/>
+              <a:buFontTx/>
+              <a:buChar char="•"/>
+              <a:tabLst/>
+            </a:pPr>
+            <a:endParaRPr kumimoji="0" lang="de-DE" altLang="de-DE" sz="2400" b="1" i="0" u="none" strike="noStrike" cap="none" normalizeH="0" baseline="0" dirty="0">
+              <a:ln>
+                <a:noFill/>
+              </a:ln>
+              <a:solidFill>
+                <a:schemeClr val="tx1"/>
+              </a:solidFill>
+              <a:effectLst/>
+            </a:endParaRPr>
+          </a:p>
+          <a:p>
+            <a:pPr marL="0" marR="0" lvl="0" indent="0" algn="l" defTabSz="914400" rtl="0" eaLnBrk="0" fontAlgn="base" latinLnBrk="0" hangingPunct="0">
+              <a:lnSpc>
+                <a:spcPct val="100000"/>
+              </a:lnSpc>
+              <a:spcBef>
+                <a:spcPct val="0"/>
+              </a:spcBef>
+              <a:spcAft>
+                <a:spcPct val="0"/>
+              </a:spcAft>
+              <a:buClrTx/>
+              <a:buSzTx/>
+              <a:buFontTx/>
+              <a:buChar char="•"/>
+              <a:tabLst/>
+            </a:pPr>
+            <a:r>
+              <a:rPr kumimoji="0" lang="de-DE" altLang="de-DE" sz="2400" b="1" i="0" u="none" strike="noStrike" cap="none" normalizeH="0" baseline="0" dirty="0">
+                <a:ln>
+                  <a:noFill/>
+                </a:ln>
+                <a:solidFill>
+                  <a:schemeClr val="tx1"/>
+                </a:solidFill>
+                <a:effectLst/>
+              </a:rPr>
+              <a:t>Keine klaren Optimierungsansätze (OR Use Cases) </a:t>
+            </a:r>
+          </a:p>
+          <a:p>
+            <a:pPr marL="0" marR="0" lvl="0" indent="0" algn="l" defTabSz="914400" rtl="0" eaLnBrk="0" fontAlgn="base" latinLnBrk="0" hangingPunct="0">
+              <a:lnSpc>
+                <a:spcPct val="100000"/>
+              </a:lnSpc>
+              <a:spcBef>
+                <a:spcPct val="0"/>
+              </a:spcBef>
+              <a:spcAft>
+                <a:spcPct val="0"/>
+              </a:spcAft>
+              <a:buClrTx/>
+              <a:buSzTx/>
+              <a:buFontTx/>
+              <a:buChar char="•"/>
+              <a:tabLst/>
+            </a:pPr>
+            <a:endParaRPr kumimoji="0" lang="de-DE" altLang="de-DE" sz="2400" b="1" i="0" u="none" strike="noStrike" cap="none" normalizeH="0" baseline="0" dirty="0">
+              <a:ln>
+                <a:noFill/>
+              </a:ln>
+              <a:solidFill>
+                <a:schemeClr val="tx1"/>
+              </a:solidFill>
+              <a:effectLst/>
+            </a:endParaRPr>
+          </a:p>
+          <a:p>
+            <a:pPr marL="0" marR="0" lvl="0" indent="0" algn="l" defTabSz="914400" rtl="0" eaLnBrk="0" fontAlgn="base" latinLnBrk="0" hangingPunct="0">
+              <a:lnSpc>
+                <a:spcPct val="100000"/>
+              </a:lnSpc>
+              <a:spcBef>
+                <a:spcPct val="0"/>
+              </a:spcBef>
+              <a:spcAft>
+                <a:spcPct val="0"/>
+              </a:spcAft>
+              <a:buClrTx/>
+              <a:buSzTx/>
+              <a:buFontTx/>
+              <a:buChar char="•"/>
+              <a:tabLst/>
+            </a:pPr>
+            <a:r>
+              <a:rPr kumimoji="0" lang="de-DE" altLang="de-DE" sz="2400" b="1" i="0" u="none" strike="noStrike" cap="none" normalizeH="0" baseline="0" dirty="0">
+                <a:ln>
+                  <a:noFill/>
+                </a:ln>
+                <a:solidFill>
+                  <a:schemeClr val="tx1"/>
+                </a:solidFill>
+                <a:effectLst/>
+              </a:rPr>
+              <a:t>Manuelle Analyse zu aufwendig </a:t>
+            </a:r>
+          </a:p>
+          <a:p>
+            <a:pPr marL="0" marR="0" lvl="0" indent="0" algn="l" defTabSz="914400" rtl="0" eaLnBrk="0" fontAlgn="base" latinLnBrk="0" hangingPunct="0">
+              <a:lnSpc>
+                <a:spcPct val="100000"/>
+              </a:lnSpc>
+              <a:spcBef>
+                <a:spcPct val="0"/>
+              </a:spcBef>
+              <a:spcAft>
+                <a:spcPct val="0"/>
+              </a:spcAft>
+              <a:buClrTx/>
+              <a:buSzTx/>
+              <a:buFontTx/>
+              <a:buChar char="•"/>
+              <a:tabLst/>
+            </a:pPr>
+            <a:endParaRPr kumimoji="0" lang="de-DE" altLang="de-DE" sz="2400" b="1" i="0" u="none" strike="noStrike" cap="none" normalizeH="0" baseline="0" dirty="0">
+              <a:ln>
+                <a:noFill/>
+              </a:ln>
+              <a:solidFill>
+                <a:schemeClr val="tx1"/>
+              </a:solidFill>
+              <a:effectLst/>
+            </a:endParaRPr>
+          </a:p>
+          <a:p>
+            <a:pPr marL="0" marR="0" lvl="0" indent="0" algn="l" defTabSz="914400" rtl="0" eaLnBrk="0" fontAlgn="base" latinLnBrk="0" hangingPunct="0">
+              <a:lnSpc>
+                <a:spcPct val="100000"/>
+              </a:lnSpc>
+              <a:spcBef>
+                <a:spcPct val="0"/>
+              </a:spcBef>
+              <a:spcAft>
+                <a:spcPct val="0"/>
+              </a:spcAft>
+              <a:buClrTx/>
+              <a:buSzTx/>
+              <a:buFontTx/>
+              <a:buChar char="•"/>
+              <a:tabLst/>
+            </a:pPr>
+            <a:r>
+              <a:rPr kumimoji="0" lang="de-DE" altLang="de-DE" sz="2400" b="1" i="0" u="none" strike="noStrike" cap="none" normalizeH="0" baseline="0" dirty="0">
+                <a:ln>
+                  <a:noFill/>
+                </a:ln>
+                <a:solidFill>
+                  <a:schemeClr val="tx1"/>
+                </a:solidFill>
+                <a:effectLst/>
+              </a:rPr>
+              <a:t>Fehlende Parameter (z. B. Kosten) </a:t>
+            </a:r>
+          </a:p>
+          <a:p>
+            <a:pPr marL="0" marR="0" lvl="0" indent="0" algn="l" defTabSz="914400" rtl="0" eaLnBrk="0" fontAlgn="base" latinLnBrk="0" hangingPunct="0">
+              <a:lnSpc>
+                <a:spcPct val="100000"/>
+              </a:lnSpc>
+              <a:spcBef>
+                <a:spcPct val="0"/>
+              </a:spcBef>
+              <a:spcAft>
+                <a:spcPct val="0"/>
+              </a:spcAft>
+              <a:buClrTx/>
+              <a:buSzTx/>
+              <a:buFontTx/>
+              <a:buChar char="•"/>
+              <a:tabLst/>
+            </a:pPr>
+            <a:endParaRPr kumimoji="0" lang="de-DE" altLang="de-DE" sz="2400" b="1" i="0" u="none" strike="noStrike" cap="none" normalizeH="0" baseline="0" dirty="0">
+              <a:ln>
+                <a:noFill/>
+              </a:ln>
+              <a:solidFill>
+                <a:schemeClr val="tx1"/>
+              </a:solidFill>
+              <a:effectLst/>
+            </a:endParaRPr>
+          </a:p>
+          <a:p>
+            <a:pPr marL="0" marR="0" lvl="0" indent="0" algn="l" defTabSz="914400" rtl="0" eaLnBrk="0" fontAlgn="base" latinLnBrk="0" hangingPunct="0">
+              <a:lnSpc>
+                <a:spcPct val="100000"/>
+              </a:lnSpc>
+              <a:spcBef>
+                <a:spcPct val="0"/>
+              </a:spcBef>
+              <a:spcAft>
+                <a:spcPct val="0"/>
+              </a:spcAft>
+              <a:buClrTx/>
+              <a:buSzTx/>
+              <a:buFontTx/>
+              <a:buChar char="•"/>
+              <a:tabLst/>
+            </a:pPr>
+            <a:r>
+              <a:rPr kumimoji="0" lang="de-DE" altLang="de-DE" sz="2400" b="1" i="0" u="none" strike="noStrike" cap="none" normalizeH="0" baseline="0" dirty="0">
+                <a:ln>
+                  <a:noFill/>
+                </a:ln>
+                <a:solidFill>
+                  <a:schemeClr val="tx1"/>
+                </a:solidFill>
+                <a:effectLst/>
+              </a:rPr>
+              <a:t>Schwieriger Weg von Daten zu Optimierungsmodell </a:t>
             </a:r>
           </a:p>
         </p:txBody>
@@ -13593,35 +13934,6 @@
       </p:grpSpPr>
       <p:sp>
         <p:nvSpPr>
-          <p:cNvPr id="2" name="Fußzeilenplatzhalter 1">
-            <a:extLst>
-              <a:ext uri="{FF2B5EF4-FFF2-40B4-BE49-F238E27FC236}">
-                <a16:creationId xmlns:a16="http://schemas.microsoft.com/office/drawing/2014/main" id="{E4D47998-9EB5-F33A-A33F-668EB7436760}"/>
-              </a:ext>
-            </a:extLst>
-          </p:cNvPr>
-          <p:cNvSpPr>
-            <a:spLocks noGrp="1"/>
-          </p:cNvSpPr>
-          <p:nvPr>
-            <p:ph type="ftr" sz="quarter" idx="26"/>
-          </p:nvPr>
-        </p:nvSpPr>
-        <p:spPr/>
-        <p:txBody>
-          <a:bodyPr/>
-          <a:lstStyle/>
-          <a:p>
-            <a:r>
-              <a:rPr lang="de-DE"/>
-              <a:t>Organisationseinheit | Autorin/Autor | Name der Veranstaltung/Vorlesung</a:t>
-            </a:r>
-            <a:endParaRPr lang="de-DE" dirty="0"/>
-          </a:p>
-        </p:txBody>
-      </p:sp>
-      <p:sp>
-        <p:nvSpPr>
           <p:cNvPr id="3" name="Foliennummernplatzhalter 2">
             <a:extLst>
               <a:ext uri="{FF2B5EF4-FFF2-40B4-BE49-F238E27FC236}">
@@ -13672,12 +13984,8 @@
           <a:lstStyle/>
           <a:p>
             <a:r>
-              <a:rPr lang="de-DE" dirty="0" err="1"/>
-              <a:t>UseCase</a:t>
-            </a:r>
-            <a:r>
               <a:rPr lang="de-DE" dirty="0"/>
-              <a:t> Agent</a:t>
+              <a:t>Architektur</a:t>
             </a:r>
           </a:p>
         </p:txBody>
@@ -13705,25 +14013,189 @@
           <a:p>
             <a:r>
               <a:rPr lang="de-DE" dirty="0"/>
-              <a:t>Anforderungen</a:t>
-            </a:r>
-          </a:p>
-        </p:txBody>
-      </p:sp>
-      <p:sp>
-        <p:nvSpPr>
-          <p:cNvPr id="6" name="Textplatzhalter 5">
-            <a:extLst>
-              <a:ext uri="{FF2B5EF4-FFF2-40B4-BE49-F238E27FC236}">
-                <a16:creationId xmlns:a16="http://schemas.microsoft.com/office/drawing/2014/main" id="{9C6F9E4D-5C55-2BEE-5C6C-34FD78C0BAE9}"/>
-              </a:ext>
-            </a:extLst>
-          </p:cNvPr>
-          <p:cNvSpPr>
-            <a:spLocks noGrp="1"/>
+              <a:t>Überblick</a:t>
+            </a:r>
+          </a:p>
+        </p:txBody>
+      </p:sp>
+      <p:pic>
+        <p:nvPicPr>
+          <p:cNvPr id="10" name="Grafik 9">
+            <a:extLst>
+              <a:ext uri="{FF2B5EF4-FFF2-40B4-BE49-F238E27FC236}">
+                <a16:creationId xmlns:a16="http://schemas.microsoft.com/office/drawing/2014/main" id="{9467F380-45D8-AAF9-A66E-4BD76AB74F19}"/>
+              </a:ext>
+            </a:extLst>
+          </p:cNvPr>
+          <p:cNvPicPr>
+            <a:picLocks noChangeAspect="1"/>
+          </p:cNvPicPr>
+          <p:nvPr/>
+        </p:nvPicPr>
+        <p:blipFill>
+          <a:blip r:embed="rId2">
+            <a:extLst>
+              <a:ext uri="{28A0092B-C50C-407E-A947-70E740481C1C}">
+                <a14:useLocalDpi xmlns:a14="http://schemas.microsoft.com/office/drawing/2010/main" val="0"/>
+              </a:ext>
+            </a:extLst>
+          </a:blip>
+          <a:srcRect b="2576"/>
+          <a:stretch>
+            <a:fillRect/>
+          </a:stretch>
+        </p:blipFill>
+        <p:spPr>
+          <a:xfrm>
+            <a:off x="5337098" y="13253"/>
+            <a:ext cx="5477280" cy="6755410"/>
+          </a:xfrm>
+          <a:prstGeom prst="rect">
+            <a:avLst/>
+          </a:prstGeom>
+        </p:spPr>
+      </p:pic>
+      <p:sp>
+        <p:nvSpPr>
+          <p:cNvPr id="11" name="Rectangle 2">
+            <a:extLst>
+              <a:ext uri="{FF2B5EF4-FFF2-40B4-BE49-F238E27FC236}">
+                <a16:creationId xmlns:a16="http://schemas.microsoft.com/office/drawing/2014/main" id="{54D827A4-8B21-5B34-D77F-61926B78546E}"/>
+              </a:ext>
+            </a:extLst>
+          </p:cNvPr>
+          <p:cNvSpPr>
+            <a:spLocks noGrp="1" noChangeArrowheads="1"/>
           </p:cNvSpPr>
           <p:nvPr>
             <p:ph type="body" sz="quarter" idx="16"/>
+          </p:nvPr>
+        </p:nvSpPr>
+        <p:spPr bwMode="auto">
+          <a:xfrm>
+            <a:off x="613834" y="1478821"/>
+            <a:ext cx="4830525" cy="4477123"/>
+          </a:xfrm>
+          <a:prstGeom prst="rect">
+            <a:avLst/>
+          </a:prstGeom>
+          <a:noFill/>
+          <a:ln>
+            <a:noFill/>
+          </a:ln>
+          <a:effectLst/>
+          <a:extLst>
+            <a:ext uri="{909E8E84-426E-40DD-AFC4-6F175D3DCCD1}">
+              <a14:hiddenFill xmlns:a14="http://schemas.microsoft.com/office/drawing/2010/main">
+                <a:solidFill>
+                  <a:schemeClr val="accent1"/>
+                </a:solidFill>
+              </a14:hiddenFill>
+            </a:ext>
+            <a:ext uri="{91240B29-F687-4F45-9708-019B960494DF}">
+              <a14:hiddenLine xmlns:a14="http://schemas.microsoft.com/office/drawing/2010/main" w="9525">
+                <a:solidFill>
+                  <a:schemeClr val="tx1"/>
+                </a:solidFill>
+                <a:miter lim="800000"/>
+                <a:headEnd/>
+                <a:tailEnd/>
+              </a14:hiddenLine>
+            </a:ext>
+            <a:ext uri="{AF507438-7753-43E0-B8FC-AC1667EBCBE1}">
+              <a14:hiddenEffects xmlns:a14="http://schemas.microsoft.com/office/drawing/2010/main">
+                <a:effectLst>
+                  <a:outerShdw dist="35921" dir="2700000" algn="ctr" rotWithShape="0">
+                    <a:schemeClr val="bg2"/>
+                  </a:outerShdw>
+                </a:effectLst>
+              </a14:hiddenEffects>
+            </a:ext>
+          </a:extLst>
+        </p:spPr>
+        <p:txBody>
+          <a:bodyPr vert="horz" wrap="square" lIns="91440" tIns="45720" rIns="91440" bIns="45720" numCol="1" anchor="ctr" anchorCtr="0" compatLnSpc="1">
+            <a:prstTxWarp prst="textNoShape">
+              <a:avLst/>
+            </a:prstTxWarp>
+            <a:spAutoFit/>
+          </a:bodyPr>
+          <a:lstStyle/>
+          <a:p>
+            <a:r>
+              <a:rPr lang="de-DE" sz="1600" b="1" dirty="0"/>
+              <a:t>Input: CSV-Produktionsdaten </a:t>
+            </a:r>
+          </a:p>
+          <a:p>
+            <a:endParaRPr lang="de-DE" sz="1600" b="1" dirty="0"/>
+          </a:p>
+          <a:p>
+            <a:r>
+              <a:rPr lang="de-DE" sz="1600" b="1" dirty="0"/>
+              <a:t>Use Case Agent erkennt Optimierungspotenzial </a:t>
+            </a:r>
+          </a:p>
+          <a:p>
+            <a:endParaRPr lang="de-DE" sz="1600" b="1" dirty="0"/>
+          </a:p>
+          <a:p>
+            <a:r>
+              <a:rPr lang="de-DE" sz="1600" b="1" dirty="0"/>
+              <a:t>Modelling Agent erstellt mathematisches Modell (MILP) </a:t>
+            </a:r>
+          </a:p>
+          <a:p>
+            <a:endParaRPr lang="de-DE" sz="1600" b="1" dirty="0"/>
+          </a:p>
+          <a:p>
+            <a:r>
+              <a:rPr lang="de-DE" sz="1600" b="1" dirty="0"/>
+              <a:t>Data </a:t>
+            </a:r>
+            <a:r>
+              <a:rPr lang="de-DE" sz="1600" b="1" dirty="0" err="1"/>
+              <a:t>Processor</a:t>
+            </a:r>
+            <a:r>
+              <a:rPr lang="de-DE" sz="1600" b="1" dirty="0"/>
+              <a:t> bereitet Daten vor</a:t>
+            </a:r>
+          </a:p>
+          <a:p>
+            <a:endParaRPr lang="de-DE" sz="1600" b="1" dirty="0"/>
+          </a:p>
+          <a:p>
+            <a:r>
+              <a:rPr lang="de-DE" sz="1600" b="1" dirty="0"/>
+              <a:t>Scripting Agent erstellt ausführbaren Code </a:t>
+            </a:r>
+          </a:p>
+          <a:p>
+            <a:endParaRPr lang="de-DE" sz="1600" b="1" dirty="0"/>
+          </a:p>
+          <a:p>
+            <a:r>
+              <a:rPr lang="de-DE" sz="1600" b="1" dirty="0"/>
+              <a:t>Output: optimale Lösung + Kennzahlen </a:t>
+            </a:r>
+          </a:p>
+        </p:txBody>
+      </p:sp>
+      <p:sp>
+        <p:nvSpPr>
+          <p:cNvPr id="2" name="Fußzeilenplatzhalter 1">
+            <a:extLst>
+              <a:ext uri="{FF2B5EF4-FFF2-40B4-BE49-F238E27FC236}">
+                <a16:creationId xmlns:a16="http://schemas.microsoft.com/office/drawing/2014/main" id="{E4D47998-9EB5-F33A-A33F-668EB7436760}"/>
+              </a:ext>
+            </a:extLst>
+          </p:cNvPr>
+          <p:cNvSpPr>
+            <a:spLocks noGrp="1"/>
+          </p:cNvSpPr>
+          <p:nvPr>
+            <p:ph type="ftr" sz="quarter" idx="26"/>
           </p:nvPr>
         </p:nvSpPr>
         <p:spPr/>
@@ -13733,7 +14205,7 @@
           <a:p>
             <a:r>
               <a:rPr lang="de-DE" dirty="0"/>
-              <a:t>…</a:t>
+              <a:t>IM | Christopher Liebl, Benedikt Buttenmüller, Simon Lamprecht, Johannes Lange, Tom Weigel, Bastian Hymon | KI-Projekt</a:t>
             </a:r>
           </a:p>
         </p:txBody>
@@ -13796,10 +14268,9 @@
           <a:lstStyle/>
           <a:p>
             <a:r>
-              <a:rPr lang="de-DE"/>
-              <a:t>Organisationseinheit | Autorin/Autor | Name der Veranstaltung/Vorlesung</a:t>
-            </a:r>
-            <a:endParaRPr lang="de-DE" dirty="0"/>
+              <a:rPr lang="de-DE" dirty="0"/>
+              <a:t>IM | Christopher Liebl, Benedikt Buttenmüller, Simon Lamprecht, Johannes Lange, Tom Weigel, Bastian Hymon | KI-Projekt</a:t>
+            </a:r>
           </a:p>
         </p:txBody>
       </p:sp>
@@ -13888,39 +14359,400 @@
           <a:p>
             <a:r>
               <a:rPr lang="de-DE" dirty="0"/>
-              <a:t>Architektur</a:t>
-            </a:r>
-          </a:p>
-        </p:txBody>
-      </p:sp>
-      <p:sp>
-        <p:nvSpPr>
-          <p:cNvPr id="6" name="Textplatzhalter 5">
-            <a:extLst>
-              <a:ext uri="{FF2B5EF4-FFF2-40B4-BE49-F238E27FC236}">
-                <a16:creationId xmlns:a16="http://schemas.microsoft.com/office/drawing/2014/main" id="{3652BBD5-E06E-97F6-3B31-46DC9E37C0F8}"/>
-              </a:ext>
-            </a:extLst>
-          </p:cNvPr>
-          <p:cNvSpPr>
-            <a:spLocks noGrp="1"/>
+              <a:t>Beschreibung</a:t>
+            </a:r>
+          </a:p>
+        </p:txBody>
+      </p:sp>
+      <p:sp>
+        <p:nvSpPr>
+          <p:cNvPr id="8" name="Rectangle 2">
+            <a:extLst>
+              <a:ext uri="{FF2B5EF4-FFF2-40B4-BE49-F238E27FC236}">
+                <a16:creationId xmlns:a16="http://schemas.microsoft.com/office/drawing/2014/main" id="{B3DB61B0-298C-0D54-FC60-BD2CDD42633E}"/>
+              </a:ext>
+            </a:extLst>
+          </p:cNvPr>
+          <p:cNvSpPr>
+            <a:spLocks noGrp="1" noChangeArrowheads="1"/>
           </p:cNvSpPr>
           <p:nvPr>
             <p:ph type="body" sz="quarter" idx="16"/>
           </p:nvPr>
         </p:nvSpPr>
-        <p:spPr/>
-        <p:txBody>
-          <a:bodyPr/>
+        <p:spPr bwMode="auto">
+          <a:xfrm>
+            <a:off x="695325" y="1824557"/>
+            <a:ext cx="6231193" cy="3785652"/>
+          </a:xfrm>
+          <a:prstGeom prst="rect">
+            <a:avLst/>
+          </a:prstGeom>
+          <a:noFill/>
+          <a:ln>
+            <a:noFill/>
+          </a:ln>
+          <a:effectLst/>
+          <a:extLst>
+            <a:ext uri="{909E8E84-426E-40DD-AFC4-6F175D3DCCD1}">
+              <a14:hiddenFill xmlns:a14="http://schemas.microsoft.com/office/drawing/2010/main">
+                <a:solidFill>
+                  <a:schemeClr val="accent1"/>
+                </a:solidFill>
+              </a14:hiddenFill>
+            </a:ext>
+            <a:ext uri="{91240B29-F687-4F45-9708-019B960494DF}">
+              <a14:hiddenLine xmlns:a14="http://schemas.microsoft.com/office/drawing/2010/main" w="9525">
+                <a:solidFill>
+                  <a:schemeClr val="tx1"/>
+                </a:solidFill>
+                <a:miter lim="800000"/>
+                <a:headEnd/>
+                <a:tailEnd/>
+              </a14:hiddenLine>
+            </a:ext>
+            <a:ext uri="{AF507438-7753-43E0-B8FC-AC1667EBCBE1}">
+              <a14:hiddenEffects xmlns:a14="http://schemas.microsoft.com/office/drawing/2010/main">
+                <a:effectLst>
+                  <a:outerShdw dist="35921" dir="2700000" algn="ctr" rotWithShape="0">
+                    <a:schemeClr val="bg2"/>
+                  </a:outerShdw>
+                </a:effectLst>
+              </a14:hiddenEffects>
+            </a:ext>
+          </a:extLst>
+        </p:spPr>
+        <p:txBody>
+          <a:bodyPr vert="horz" wrap="none" lIns="91440" tIns="45720" rIns="91440" bIns="45720" numCol="1" anchor="ctr" anchorCtr="0" compatLnSpc="1">
+            <a:prstTxWarp prst="textNoShape">
+              <a:avLst/>
+            </a:prstTxWarp>
+            <a:spAutoFit/>
+          </a:bodyPr>
           <a:lstStyle/>
           <a:p>
-            <a:r>
-              <a:rPr lang="de-DE" dirty="0"/>
-              <a:t>…</a:t>
-            </a:r>
-          </a:p>
-        </p:txBody>
-      </p:sp>
+            <a:pPr marL="0" marR="0" lvl="0" indent="0" algn="l" defTabSz="914400" rtl="0" eaLnBrk="0" fontAlgn="base" latinLnBrk="0" hangingPunct="0">
+              <a:lnSpc>
+                <a:spcPct val="100000"/>
+              </a:lnSpc>
+              <a:spcBef>
+                <a:spcPct val="0"/>
+              </a:spcBef>
+              <a:spcAft>
+                <a:spcPct val="0"/>
+              </a:spcAft>
+              <a:buClrTx/>
+              <a:buSzTx/>
+              <a:buFontTx/>
+              <a:buNone/>
+              <a:tabLst/>
+            </a:pPr>
+            <a:endParaRPr kumimoji="0" lang="de-DE" altLang="de-DE" sz="2400" b="1" i="0" u="none" strike="noStrike" cap="none" normalizeH="0" baseline="0" dirty="0">
+              <a:ln>
+                <a:noFill/>
+              </a:ln>
+              <a:solidFill>
+                <a:schemeClr val="tx1"/>
+              </a:solidFill>
+              <a:effectLst/>
+            </a:endParaRPr>
+          </a:p>
+          <a:p>
+            <a:pPr marL="0" marR="0" lvl="0" indent="0" algn="l" defTabSz="914400" rtl="0" eaLnBrk="0" fontAlgn="base" latinLnBrk="0" hangingPunct="0">
+              <a:lnSpc>
+                <a:spcPct val="100000"/>
+              </a:lnSpc>
+              <a:spcBef>
+                <a:spcPct val="0"/>
+              </a:spcBef>
+              <a:spcAft>
+                <a:spcPct val="0"/>
+              </a:spcAft>
+              <a:buClrTx/>
+              <a:buSzTx/>
+              <a:buFontTx/>
+              <a:buChar char="•"/>
+              <a:tabLst/>
+            </a:pPr>
+            <a:r>
+              <a:rPr kumimoji="0" lang="de-DE" altLang="de-DE" sz="2400" b="1" i="0" u="none" strike="noStrike" cap="none" normalizeH="0" baseline="0" dirty="0">
+                <a:ln>
+                  <a:noFill/>
+                </a:ln>
+                <a:solidFill>
+                  <a:schemeClr val="tx1"/>
+                </a:solidFill>
+                <a:effectLst/>
+              </a:rPr>
+              <a:t>Analysiert CSV-Daten</a:t>
+            </a:r>
+          </a:p>
+          <a:p>
+            <a:pPr marL="0" marR="0" lvl="0" indent="0" algn="l" defTabSz="914400" rtl="0" eaLnBrk="0" fontAlgn="base" latinLnBrk="0" hangingPunct="0">
+              <a:lnSpc>
+                <a:spcPct val="100000"/>
+              </a:lnSpc>
+              <a:spcBef>
+                <a:spcPct val="0"/>
+              </a:spcBef>
+              <a:spcAft>
+                <a:spcPct val="0"/>
+              </a:spcAft>
+              <a:buClrTx/>
+              <a:buSzTx/>
+              <a:buNone/>
+              <a:tabLst/>
+            </a:pPr>
+            <a:endParaRPr kumimoji="0" lang="de-DE" altLang="de-DE" sz="2400" b="1" i="0" u="none" strike="noStrike" cap="none" normalizeH="0" baseline="0" dirty="0">
+              <a:ln>
+                <a:noFill/>
+              </a:ln>
+              <a:solidFill>
+                <a:schemeClr val="tx1"/>
+              </a:solidFill>
+              <a:effectLst/>
+            </a:endParaRPr>
+          </a:p>
+          <a:p>
+            <a:pPr marL="0" marR="0" lvl="0" indent="0" algn="l" defTabSz="914400" rtl="0" eaLnBrk="0" fontAlgn="base" latinLnBrk="0" hangingPunct="0">
+              <a:lnSpc>
+                <a:spcPct val="100000"/>
+              </a:lnSpc>
+              <a:spcBef>
+                <a:spcPct val="0"/>
+              </a:spcBef>
+              <a:spcAft>
+                <a:spcPct val="0"/>
+              </a:spcAft>
+              <a:buClrTx/>
+              <a:buSzTx/>
+              <a:buFontTx/>
+              <a:buChar char="•"/>
+              <a:tabLst/>
+            </a:pPr>
+            <a:r>
+              <a:rPr kumimoji="0" lang="de-DE" altLang="de-DE" sz="2400" b="1" i="0" u="none" strike="noStrike" cap="none" normalizeH="0" baseline="0" dirty="0">
+                <a:ln>
+                  <a:noFill/>
+                </a:ln>
+                <a:solidFill>
+                  <a:schemeClr val="tx1"/>
+                </a:solidFill>
+                <a:effectLst/>
+              </a:rPr>
+              <a:t>Identifiziert mögliche OR Use Cases </a:t>
+            </a:r>
+          </a:p>
+          <a:p>
+            <a:pPr marL="0" marR="0" lvl="0" indent="0" algn="l" defTabSz="914400" rtl="0" eaLnBrk="0" fontAlgn="base" latinLnBrk="0" hangingPunct="0">
+              <a:lnSpc>
+                <a:spcPct val="100000"/>
+              </a:lnSpc>
+              <a:spcBef>
+                <a:spcPct val="0"/>
+              </a:spcBef>
+              <a:spcAft>
+                <a:spcPct val="0"/>
+              </a:spcAft>
+              <a:buClrTx/>
+              <a:buSzTx/>
+              <a:buFontTx/>
+              <a:buChar char="•"/>
+              <a:tabLst/>
+            </a:pPr>
+            <a:endParaRPr kumimoji="0" lang="de-DE" altLang="de-DE" sz="2400" b="1" i="0" u="none" strike="noStrike" cap="none" normalizeH="0" baseline="0" dirty="0">
+              <a:ln>
+                <a:noFill/>
+              </a:ln>
+              <a:solidFill>
+                <a:schemeClr val="tx1"/>
+              </a:solidFill>
+              <a:effectLst/>
+            </a:endParaRPr>
+          </a:p>
+          <a:p>
+            <a:pPr marL="0" marR="0" lvl="0" indent="0" algn="l" defTabSz="914400" rtl="0" eaLnBrk="0" fontAlgn="base" latinLnBrk="0" hangingPunct="0">
+              <a:lnSpc>
+                <a:spcPct val="100000"/>
+              </a:lnSpc>
+              <a:spcBef>
+                <a:spcPct val="0"/>
+              </a:spcBef>
+              <a:spcAft>
+                <a:spcPct val="0"/>
+              </a:spcAft>
+              <a:buClrTx/>
+              <a:buSzTx/>
+              <a:buFontTx/>
+              <a:buChar char="•"/>
+              <a:tabLst/>
+            </a:pPr>
+            <a:r>
+              <a:rPr kumimoji="0" lang="de-DE" altLang="de-DE" sz="2400" b="1" i="0" u="none" strike="noStrike" cap="none" normalizeH="0" baseline="0" dirty="0">
+                <a:ln>
+                  <a:noFill/>
+                </a:ln>
+                <a:solidFill>
+                  <a:schemeClr val="tx1"/>
+                </a:solidFill>
+                <a:effectLst/>
+              </a:rPr>
+              <a:t>Statistische Analyse der Daten</a:t>
+            </a:r>
+          </a:p>
+          <a:p>
+            <a:pPr marL="0" marR="0" lvl="0" indent="0" algn="l" defTabSz="914400" rtl="0" eaLnBrk="0" fontAlgn="base" latinLnBrk="0" hangingPunct="0">
+              <a:lnSpc>
+                <a:spcPct val="100000"/>
+              </a:lnSpc>
+              <a:spcBef>
+                <a:spcPct val="0"/>
+              </a:spcBef>
+              <a:spcAft>
+                <a:spcPct val="0"/>
+              </a:spcAft>
+              <a:buClrTx/>
+              <a:buSzTx/>
+              <a:buFontTx/>
+              <a:buChar char="•"/>
+              <a:tabLst/>
+            </a:pPr>
+            <a:endParaRPr kumimoji="0" lang="de-DE" altLang="de-DE" sz="2400" b="1" i="0" u="none" strike="noStrike" cap="none" normalizeH="0" baseline="0" dirty="0">
+              <a:ln>
+                <a:noFill/>
+              </a:ln>
+              <a:solidFill>
+                <a:schemeClr val="tx1"/>
+              </a:solidFill>
+              <a:effectLst/>
+            </a:endParaRPr>
+          </a:p>
+          <a:p>
+            <a:pPr marL="0" marR="0" lvl="0" indent="0" algn="l" defTabSz="914400" rtl="0" eaLnBrk="0" fontAlgn="base" latinLnBrk="0" hangingPunct="0">
+              <a:lnSpc>
+                <a:spcPct val="100000"/>
+              </a:lnSpc>
+              <a:spcBef>
+                <a:spcPct val="0"/>
+              </a:spcBef>
+              <a:spcAft>
+                <a:spcPct val="0"/>
+              </a:spcAft>
+              <a:buClrTx/>
+              <a:buSzTx/>
+              <a:buFontTx/>
+              <a:buChar char="•"/>
+              <a:tabLst/>
+            </a:pPr>
+            <a:r>
+              <a:rPr kumimoji="0" lang="de-DE" altLang="de-DE" sz="2400" b="1" i="0" u="none" strike="noStrike" cap="none" normalizeH="0" baseline="0" dirty="0">
+                <a:ln>
+                  <a:noFill/>
+                </a:ln>
+                <a:solidFill>
+                  <a:schemeClr val="tx1"/>
+                </a:solidFill>
+                <a:effectLst/>
+              </a:rPr>
+              <a:t>Wählt den „besten“ Use Case aus </a:t>
+            </a:r>
+          </a:p>
+          <a:p>
+            <a:pPr marL="0" marR="0" lvl="0" indent="0" algn="l" defTabSz="914400" rtl="0" eaLnBrk="0" fontAlgn="base" latinLnBrk="0" hangingPunct="0">
+              <a:lnSpc>
+                <a:spcPct val="100000"/>
+              </a:lnSpc>
+              <a:spcBef>
+                <a:spcPct val="0"/>
+              </a:spcBef>
+              <a:spcAft>
+                <a:spcPct val="0"/>
+              </a:spcAft>
+              <a:buClrTx/>
+              <a:buSzTx/>
+              <a:buFontTx/>
+              <a:buChar char="•"/>
+              <a:tabLst/>
+            </a:pPr>
+            <a:endParaRPr kumimoji="0" lang="de-DE" altLang="de-DE" sz="2400" b="1" i="0" u="none" strike="noStrike" cap="none" normalizeH="0" baseline="0" dirty="0">
+              <a:ln>
+                <a:noFill/>
+              </a:ln>
+              <a:solidFill>
+                <a:schemeClr val="tx1"/>
+              </a:solidFill>
+              <a:effectLst/>
+            </a:endParaRPr>
+          </a:p>
+          <a:p>
+            <a:pPr marL="0" marR="0" lvl="0" indent="0" algn="l" defTabSz="914400" rtl="0" eaLnBrk="0" fontAlgn="base" latinLnBrk="0" hangingPunct="0">
+              <a:lnSpc>
+                <a:spcPct val="100000"/>
+              </a:lnSpc>
+              <a:spcBef>
+                <a:spcPct val="0"/>
+              </a:spcBef>
+              <a:spcAft>
+                <a:spcPct val="0"/>
+              </a:spcAft>
+              <a:buClrTx/>
+              <a:buSzTx/>
+              <a:buFontTx/>
+              <a:buChar char="•"/>
+              <a:tabLst/>
+            </a:pPr>
+            <a:r>
+              <a:rPr kumimoji="0" lang="de-DE" altLang="de-DE" sz="2400" b="1" i="0" u="none" strike="noStrike" cap="none" normalizeH="0" baseline="0" dirty="0">
+                <a:ln>
+                  <a:noFill/>
+                </a:ln>
+                <a:solidFill>
+                  <a:schemeClr val="tx1"/>
+                </a:solidFill>
+                <a:effectLst/>
+              </a:rPr>
+              <a:t>Definiert zu optimierende Variablen </a:t>
+            </a:r>
+          </a:p>
+        </p:txBody>
+      </p:sp>
+      <p:pic>
+        <p:nvPicPr>
+          <p:cNvPr id="9" name="Grafik 8">
+            <a:extLst>
+              <a:ext uri="{FF2B5EF4-FFF2-40B4-BE49-F238E27FC236}">
+                <a16:creationId xmlns:a16="http://schemas.microsoft.com/office/drawing/2014/main" id="{432EABEE-6823-3222-C46A-FAC3187E06F1}"/>
+              </a:ext>
+            </a:extLst>
+          </p:cNvPr>
+          <p:cNvPicPr>
+            <a:picLocks noChangeAspect="1"/>
+          </p:cNvPicPr>
+          <p:nvPr/>
+        </p:nvPicPr>
+        <p:blipFill>
+          <a:blip r:embed="rId2">
+            <a:extLst>
+              <a:ext uri="{28A0092B-C50C-407E-A947-70E740481C1C}">
+                <a14:useLocalDpi xmlns:a14="http://schemas.microsoft.com/office/drawing/2010/main" val="0"/>
+              </a:ext>
+            </a:extLst>
+          </a:blip>
+          <a:srcRect t="1479" r="48534" b="55513"/>
+          <a:stretch>
+            <a:fillRect/>
+          </a:stretch>
+        </p:blipFill>
+        <p:spPr>
+          <a:xfrm>
+            <a:off x="7304675" y="1131480"/>
+            <a:ext cx="4782550" cy="5059543"/>
+          </a:xfrm>
+          <a:prstGeom prst="rect">
+            <a:avLst/>
+          </a:prstGeom>
+        </p:spPr>
+      </p:pic>
     </p:spTree>
     <p:extLst>
       <p:ext uri="{BB962C8B-B14F-4D97-AF65-F5344CB8AC3E}">
@@ -13979,10 +14811,9 @@
           <a:lstStyle/>
           <a:p>
             <a:r>
-              <a:rPr lang="de-DE"/>
-              <a:t>Organisationseinheit | Autorin/Autor | Name der Veranstaltung/Vorlesung</a:t>
-            </a:r>
-            <a:endParaRPr lang="de-DE" dirty="0"/>
+              <a:rPr lang="de-DE" dirty="0"/>
+              <a:t>IM | Christopher Liebl, Benedikt Buttenmüller, Simon Lamprecht, Johannes Lange, Tom Weigel, Bastian Hymon | KI-Projekt</a:t>
+            </a:r>
           </a:p>
         </p:txBody>
       </p:sp>
@@ -14158,10 +14989,9 @@
           <a:lstStyle/>
           <a:p>
             <a:r>
-              <a:rPr lang="de-DE"/>
-              <a:t>Organisationseinheit | Autorin/Autor | Name der Veranstaltung/Vorlesung</a:t>
-            </a:r>
-            <a:endParaRPr lang="de-DE" dirty="0"/>
+              <a:rPr lang="de-DE" dirty="0"/>
+              <a:t>IM | Christopher Liebl, Benedikt Buttenmüller, Simon Lamprecht, Johannes Lange, Tom Weigel, Bastian Hymon | KI-Projekt</a:t>
+            </a:r>
           </a:p>
         </p:txBody>
       </p:sp>
@@ -14337,10 +15167,9 @@
           <a:lstStyle/>
           <a:p>
             <a:r>
-              <a:rPr lang="de-DE"/>
-              <a:t>Organisationseinheit | Autorin/Autor | Name der Veranstaltung/Vorlesung</a:t>
-            </a:r>
-            <a:endParaRPr lang="de-DE" dirty="0"/>
+              <a:rPr lang="de-DE" dirty="0"/>
+              <a:t>IM | Christopher Liebl, Benedikt Buttenmüller, Simon Lamprecht, Johannes Lange, Tom Weigel, Bastian Hymon | KI-Projekt</a:t>
+            </a:r>
           </a:p>
         </p:txBody>
       </p:sp>
@@ -14524,10 +15353,9 @@
           <a:lstStyle/>
           <a:p>
             <a:r>
-              <a:rPr lang="de-DE"/>
-              <a:t>Organisationseinheit | Autorin/Autor | Name der Veranstaltung/Vorlesung</a:t>
-            </a:r>
-            <a:endParaRPr lang="de-DE" dirty="0"/>
+              <a:rPr lang="de-DE" dirty="0"/>
+              <a:t>IM | Christopher Liebl, Benedikt Buttenmüller, Simon Lamprecht, Johannes Lange, Tom Weigel, Bastian Hymon | KI-Projekt</a:t>
+            </a:r>
           </a:p>
         </p:txBody>
       </p:sp>
@@ -15807,6 +16635,64 @@
 </file>
 
 <file path=customXml/item2.xml><?xml version="1.0" encoding="utf-8"?>
+<p:properties xmlns:p="http://schemas.microsoft.com/office/2006/metadata/properties" xmlns:xsi="http://www.w3.org/2001/XMLSchema-instance" xmlns:pc="http://schemas.microsoft.com/office/infopath/2007/PartnerControls">
+  <documentManagement>
+    <IconOverlay xmlns="http://schemas.microsoft.com/sharepoint/v4" xsi:nil="true"/>
+    <Gruppe_x0020_Studierende xmlns="f6fd5e78-b8f3-4cb0-91f9-df1f4af60ed7">Ja</Gruppe_x0020_Studierende>
+    <Pr_x00fc_fer xmlns="f6fd5e78-b8f3-4cb0-91f9-df1f4af60ed7">
+      <UserInfo>
+        <DisplayName>Alisa Weinhold</DisplayName>
+        <AccountId>294</AccountId>
+        <AccountType/>
+      </UserInfo>
+    </Pr_x00fc_fer>
+    <Freigeber xmlns="f6fd5e78-b8f3-4cb0-91f9-df1f4af60ed7">
+      <UserInfo>
+        <DisplayName>Alisa Weinhold</DisplayName>
+        <AccountId>294</AccountId>
+        <AccountType/>
+      </UserInfo>
+    </Freigeber>
+    <Bezeichnung xmlns="f6fd5e78-b8f3-4cb0-91f9-df1f4af60ed7">Hochschulpräsentation OTH Regensburg - Vereinfachte Version - 16x9</Bezeichnung>
+    <Dokumentenart0 xmlns="f6fd5e78-b8f3-4cb0-91f9-df1f4af60ed7">Allgemeine Information</Dokumentenart0>
+    <Ersteller xmlns="f6fd5e78-b8f3-4cb0-91f9-df1f4af60ed7">
+      <UserInfo>
+        <DisplayName>Guelay Sahil</DisplayName>
+        <AccountId>439</AccountId>
+        <AccountType/>
+      </UserInfo>
+    </Ersteller>
+    <Ausgabedatum xmlns="f6fd5e78-b8f3-4cb0-91f9-df1f4af60ed7">2024-06-11T22:00:00+00:00</Ausgabedatum>
+    <G_x00fc_ltig_x0020_bis xmlns="f6fd5e78-b8f3-4cb0-91f9-df1f4af60ed7">2026-06-11T22:00:00+00:00</G_x00fc_ltig_x0020_bis>
+    <Verantwortlich xmlns="f6fd5e78-b8f3-4cb0-91f9-df1f4af60ed7">Kom</Verantwortlich>
+    <Dokumentenart xmlns="f6fd5e78-b8f3-4cb0-91f9-df1f4af60ed7">Kommunikation</Dokumentenart>
+    <_dlc_DocId xmlns="7a12b140-0691-4f70-b58e-f168b3d46def">MJAR55X3VR3P-1995469596-876</_dlc_DocId>
+    <_dlc_DocIdUrl xmlns="7a12b140-0691-4f70-b58e-f168b3d46def">
+      <Url>https://sp.hs-regensburg.de/QuO/QuD-Portal/_layouts/15/DocIdRedir.aspx?ID=MJAR55X3VR3P-1995469596-876</Url>
+      <Description>MJAR55X3VR3P-1995469596-876</Description>
+    </_dlc_DocIdUrl>
+    <SharedWithDetails xmlns="f6fd5e78-b8f3-4cb0-91f9-df1f4af60ed7" xsi:nil="true"/>
+    <SharedWithUsers xmlns="f6fd5e78-b8f3-4cb0-91f9-df1f4af60ed7">
+      <UserInfo>
+        <DisplayName/>
+        <AccountId xsi:nil="true"/>
+        <AccountType/>
+      </UserInfo>
+    </SharedWithUsers>
+  </documentManagement>
+</p:properties>
+</file>
+
+<file path=customXml/item3.xml><?xml version="1.0" encoding="utf-8"?>
+<?mso-contentType ?>
+<FormTemplates xmlns="http://schemas.microsoft.com/sharepoint/v3/contenttype/forms">
+  <Display>DocumentLibraryForm</Display>
+  <Edit>DocumentLibraryForm</Edit>
+  <New>DocumentLibraryForm</New>
+</FormTemplates>
+</file>
+
+<file path=customXml/item4.xml><?xml version="1.0" encoding="utf-8"?>
 <?mso-contentType ?>
 <spe:Receivers xmlns:spe="http://schemas.microsoft.com/sharepoint/events">
   <Receiver>
@@ -15856,64 +16742,6 @@
 </spe:Receivers>
 </file>
 
-<file path=customXml/item3.xml><?xml version="1.0" encoding="utf-8"?>
-<?mso-contentType ?>
-<FormTemplates xmlns="http://schemas.microsoft.com/sharepoint/v3/contenttype/forms">
-  <Display>DocumentLibraryForm</Display>
-  <Edit>DocumentLibraryForm</Edit>
-  <New>DocumentLibraryForm</New>
-</FormTemplates>
-</file>
-
-<file path=customXml/item4.xml><?xml version="1.0" encoding="utf-8"?>
-<p:properties xmlns:p="http://schemas.microsoft.com/office/2006/metadata/properties" xmlns:xsi="http://www.w3.org/2001/XMLSchema-instance" xmlns:pc="http://schemas.microsoft.com/office/infopath/2007/PartnerControls">
-  <documentManagement>
-    <IconOverlay xmlns="http://schemas.microsoft.com/sharepoint/v4" xsi:nil="true"/>
-    <Gruppe_x0020_Studierende xmlns="f6fd5e78-b8f3-4cb0-91f9-df1f4af60ed7">Ja</Gruppe_x0020_Studierende>
-    <Pr_x00fc_fer xmlns="f6fd5e78-b8f3-4cb0-91f9-df1f4af60ed7">
-      <UserInfo>
-        <DisplayName>Alisa Weinhold</DisplayName>
-        <AccountId>294</AccountId>
-        <AccountType/>
-      </UserInfo>
-    </Pr_x00fc_fer>
-    <Freigeber xmlns="f6fd5e78-b8f3-4cb0-91f9-df1f4af60ed7">
-      <UserInfo>
-        <DisplayName>Alisa Weinhold</DisplayName>
-        <AccountId>294</AccountId>
-        <AccountType/>
-      </UserInfo>
-    </Freigeber>
-    <Bezeichnung xmlns="f6fd5e78-b8f3-4cb0-91f9-df1f4af60ed7">Hochschulpräsentation OTH Regensburg - Vereinfachte Version - 16x9</Bezeichnung>
-    <Dokumentenart0 xmlns="f6fd5e78-b8f3-4cb0-91f9-df1f4af60ed7">Allgemeine Information</Dokumentenart0>
-    <Ersteller xmlns="f6fd5e78-b8f3-4cb0-91f9-df1f4af60ed7">
-      <UserInfo>
-        <DisplayName>Guelay Sahil</DisplayName>
-        <AccountId>439</AccountId>
-        <AccountType/>
-      </UserInfo>
-    </Ersteller>
-    <Ausgabedatum xmlns="f6fd5e78-b8f3-4cb0-91f9-df1f4af60ed7">2024-06-11T22:00:00+00:00</Ausgabedatum>
-    <G_x00fc_ltig_x0020_bis xmlns="f6fd5e78-b8f3-4cb0-91f9-df1f4af60ed7">2026-06-11T22:00:00+00:00</G_x00fc_ltig_x0020_bis>
-    <Verantwortlich xmlns="f6fd5e78-b8f3-4cb0-91f9-df1f4af60ed7">Kom</Verantwortlich>
-    <Dokumentenart xmlns="f6fd5e78-b8f3-4cb0-91f9-df1f4af60ed7">Kommunikation</Dokumentenart>
-    <_dlc_DocId xmlns="7a12b140-0691-4f70-b58e-f168b3d46def">MJAR55X3VR3P-1995469596-876</_dlc_DocId>
-    <_dlc_DocIdUrl xmlns="7a12b140-0691-4f70-b58e-f168b3d46def">
-      <Url>https://sp.hs-regensburg.de/QuO/QuD-Portal/_layouts/15/DocIdRedir.aspx?ID=MJAR55X3VR3P-1995469596-876</Url>
-      <Description>MJAR55X3VR3P-1995469596-876</Description>
-    </_dlc_DocIdUrl>
-    <SharedWithDetails xmlns="f6fd5e78-b8f3-4cb0-91f9-df1f4af60ed7" xsi:nil="true"/>
-    <SharedWithUsers xmlns="f6fd5e78-b8f3-4cb0-91f9-df1f4af60ed7">
-      <UserInfo>
-        <DisplayName/>
-        <AccountId xsi:nil="true"/>
-        <AccountType/>
-      </UserInfo>
-    </SharedWithUsers>
-  </documentManagement>
-</p:properties>
-</file>
-
 <file path=customXml/itemProps1.xml><?xml version="1.0" encoding="utf-8"?>
 <ds:datastoreItem xmlns:ds="http://schemas.openxmlformats.org/officeDocument/2006/customXml" ds:itemID="{F7C641D0-CE2F-43BA-A7E4-2DA0F4189B5B}">
   <ds:schemaRefs>
@@ -15935,22 +16763,6 @@
 </file>
 
 <file path=customXml/itemProps2.xml><?xml version="1.0" encoding="utf-8"?>
-<ds:datastoreItem xmlns:ds="http://schemas.openxmlformats.org/officeDocument/2006/customXml" ds:itemID="{21685AF1-9D8B-4832-88E0-313350BCFD5E}">
-  <ds:schemaRefs>
-    <ds:schemaRef ds:uri="http://schemas.microsoft.com/sharepoint/events"/>
-  </ds:schemaRefs>
-</ds:datastoreItem>
-</file>
-
-<file path=customXml/itemProps3.xml><?xml version="1.0" encoding="utf-8"?>
-<ds:datastoreItem xmlns:ds="http://schemas.openxmlformats.org/officeDocument/2006/customXml" ds:itemID="{6EDF356B-A5CD-4962-9955-AA824DF37FCA}">
-  <ds:schemaRefs>
-    <ds:schemaRef ds:uri="http://schemas.microsoft.com/sharepoint/v3/contenttype/forms"/>
-  </ds:schemaRefs>
-</ds:datastoreItem>
-</file>
-
-<file path=customXml/itemProps4.xml><?xml version="1.0" encoding="utf-8"?>
 <ds:datastoreItem xmlns:ds="http://schemas.openxmlformats.org/officeDocument/2006/customXml" ds:itemID="{02356504-F539-424F-9E83-9400624CC88E}">
   <ds:schemaRefs>
     <ds:schemaRef ds:uri="http://schemas.microsoft.com/office/2006/documentManagement/types"/>
@@ -15970,4 +16782,20 @@
     <ds:schemaRef ds:uri="7a12b140-0691-4f70-b58e-f168b3d46def"/>
   </ds:schemaRefs>
 </ds:datastoreItem>
+</file>
+
+<file path=customXml/itemProps3.xml><?xml version="1.0" encoding="utf-8"?>
+<ds:datastoreItem xmlns:ds="http://schemas.openxmlformats.org/officeDocument/2006/customXml" ds:itemID="{6EDF356B-A5CD-4962-9955-AA824DF37FCA}">
+  <ds:schemaRefs>
+    <ds:schemaRef ds:uri="http://schemas.microsoft.com/sharepoint/v3/contenttype/forms"/>
+  </ds:schemaRefs>
+</ds:datastoreItem>
+</file>
+
+<file path=customXml/itemProps4.xml><?xml version="1.0" encoding="utf-8"?>
+<ds:datastoreItem xmlns:ds="http://schemas.openxmlformats.org/officeDocument/2006/customXml" ds:itemID="{21685AF1-9D8B-4832-88E0-313350BCFD5E}">
+  <ds:schemaRefs>
+    <ds:schemaRef ds:uri="http://schemas.microsoft.com/sharepoint/events"/>
+  </ds:schemaRefs>
+</ds:datastoreItem>
 </file>